--- a/assets/figures-editable/appendix-studies/a-e07.pptx
+++ b/assets/figures-editable/appendix-studies/a-e07.pptx
@@ -7,7 +7,7 @@
   <p:sldIdLst>
     <p:sldId id="256" r:id="rId7"/>
   </p:sldIdLst>
-  <p:sldSz cx="8961120" cy="5660136" type="screen4x3"/>
+  <p:sldSz cx="12191695" cy="6858000" type="screen4x3"/>
   <p:notesSz cx="6858000" cy="9144000"/>
   <p:defaultTextStyle>
     <a:defPPr>
@@ -3098,14 +3098,14 @@
       <p:grpSpPr/>
       <p:sp>
         <p:nvSpPr>
-          <p:cNvPr id="2" name="text 0" descr="sci-ppt:obj-000"/>
+          <p:cNvPr id="2" name="A-E07 text 0" descr="sci-ppt:o000"/>
           <p:cNvSpPr txBox="1"/>
           <p:nvPr/>
         </p:nvSpPr>
         <p:spPr>
           <a:xfrm>
-            <a:off x="256032" y="137160"/>
-            <a:ext cx="7315200" cy="310896"/>
+            <a:off x="274320" y="118872"/>
+            <a:ext cx="11612880" cy="340105"/>
           </a:xfrm>
           <a:prstGeom prst="rect">
             <a:avLst/>
@@ -3114,7 +3114,7 @@
           <a:effectLst/>
         </p:spPr>
         <p:txBody>
-          <a:bodyPr wrap="none" lIns="0" rIns="0" tIns="0" bIns="0" anchor="ctr">
+          <a:bodyPr wrap="none" lIns="18288" rIns="18288" tIns="18288" bIns="18288" anchor="t">
             <a:spAutoFit/>
           </a:bodyPr>
           <a:lstStyle/>
@@ -3125,67 +3125,2339 @@
               </a:spcAft>
             </a:pPr>
             <a:r>
-              <a:rPr sz="1439" b="0" i="0">
+              <a:rPr sz="1900" b="1" i="0">
                 <a:solidFill>
                   <a:srgbClr val="8EDBD4"/>
                 </a:solidFill>
                 <a:latin typeface="Arial"/>
               </a:rPr>
-              <a:t>A-E07 · Physical variable map</a:t>
-            </a:r>
-          </a:p>
-        </p:txBody>
-      </p:sp>
-      <p:sp>
-        <p:nvSpPr>
-          <p:cNvPr id="3" name="ellipse 1" descr="sci-ppt:obj-001"/>
-          <p:cNvSpPr/>
+              <a:t>A-E07 · Exact work integral within the elastic model</a:t>
+            </a:r>
+          </a:p>
+        </p:txBody>
+      </p:sp>
+      <p:cxnSp>
+        <p:nvCxnSpPr>
+          <p:cNvPr id="3" name="A-E07 line 1" descr="sci-ppt:o001"/>
+          <p:cNvCxnSpPr/>
           <p:nvPr/>
-        </p:nvSpPr>
-        <p:spPr>
-          <a:xfrm>
-            <a:off x="941832" y="932688"/>
-            <a:ext cx="1408176" cy="1408176"/>
-          </a:xfrm>
-          <a:prstGeom prst="ellipse">
+        </p:nvCxnSpPr>
+        <p:spPr>
+          <a:xfrm>
+            <a:off x="914400" y="5029200"/>
+            <a:ext cx="5852160" cy="0"/>
+          </a:xfrm>
+          <a:prstGeom prst="line">
             <a:avLst/>
           </a:prstGeom>
-          <a:noFill/>
-          <a:ln w="17780">
+          <a:ln w="19050">
             <a:solidFill>
               <a:srgbClr val="B4C7D2"/>
             </a:solidFill>
           </a:ln>
           <a:effectLst/>
         </p:spPr>
-        <p:txBody>
-          <a:bodyPr rtlCol="0" anchor="ctr"/>
-          <a:lstStyle/>
-          <a:p>
-            <a:pPr algn="ctr"/>
-          </a:p>
-        </p:txBody>
-      </p:sp>
-      <p:sp>
-        <p:nvSpPr>
-          <p:cNvPr id="4" name="ellipse 2" descr="sci-ppt:obj-002"/>
+      </p:cxnSp>
+      <p:cxnSp>
+        <p:nvCxnSpPr>
+          <p:cNvPr id="4" name="A-E07 line 2" descr="sci-ppt:o002"/>
+          <p:cNvCxnSpPr/>
+          <p:nvPr/>
+        </p:nvCxnSpPr>
+        <p:spPr>
+          <a:xfrm>
+            <a:off x="914400" y="1371600"/>
+            <a:ext cx="0" cy="3657600"/>
+          </a:xfrm>
+          <a:prstGeom prst="line">
+            <a:avLst/>
+          </a:prstGeom>
+          <a:ln w="19050">
+            <a:solidFill>
+              <a:srgbClr val="B4C7D2"/>
+            </a:solidFill>
+          </a:ln>
+          <a:effectLst/>
+        </p:spPr>
+      </p:cxnSp>
+      <p:cxnSp>
+        <p:nvCxnSpPr>
+          <p:cNvPr id="5" name="A-E07 line 3" descr="sci-ppt:o003"/>
+          <p:cNvCxnSpPr/>
+          <p:nvPr/>
+        </p:nvCxnSpPr>
+        <p:spPr>
+          <a:xfrm>
+            <a:off x="914400" y="5029200"/>
+            <a:ext cx="0" cy="64008"/>
+          </a:xfrm>
+          <a:prstGeom prst="line">
+            <a:avLst/>
+          </a:prstGeom>
+          <a:ln w="12700">
+            <a:solidFill>
+              <a:srgbClr val="B4C7D2"/>
+            </a:solidFill>
+          </a:ln>
+          <a:effectLst/>
+        </p:spPr>
+      </p:cxnSp>
+      <p:cxnSp>
+        <p:nvCxnSpPr>
+          <p:cNvPr id="6" name="A-E07 line 4" descr="sci-ppt:o004"/>
+          <p:cNvCxnSpPr/>
+          <p:nvPr/>
+        </p:nvCxnSpPr>
+        <p:spPr>
+          <a:xfrm>
+            <a:off x="914400" y="1371600"/>
+            <a:ext cx="0" cy="3657600"/>
+          </a:xfrm>
+          <a:prstGeom prst="line">
+            <a:avLst/>
+          </a:prstGeom>
+          <a:ln w="7620">
+            <a:solidFill>
+              <a:srgbClr val="2E4756"/>
+            </a:solidFill>
+          </a:ln>
+          <a:effectLst/>
+        </p:spPr>
+      </p:cxnSp>
+      <p:sp>
+        <p:nvSpPr>
+          <p:cNvPr id="7" name="A-E07 text 5" descr="sci-ppt:o005"/>
+          <p:cNvSpPr txBox="1"/>
+          <p:nvPr/>
+        </p:nvSpPr>
+        <p:spPr>
+          <a:xfrm>
+            <a:off x="457200" y="5111496"/>
+            <a:ext cx="914400" cy="208407"/>
+          </a:xfrm>
+          <a:prstGeom prst="rect">
+            <a:avLst/>
+          </a:prstGeom>
+          <a:noFill/>
+          <a:effectLst/>
+        </p:spPr>
+        <p:txBody>
+          <a:bodyPr wrap="none" lIns="18288" rIns="18288" tIns="18288" bIns="18288" anchor="t">
+            <a:spAutoFit/>
+          </a:bodyPr>
+          <a:lstStyle/>
+          <a:p>
+            <a:pPr algn="ctr">
+              <a:spcAft>
+                <a:spcPts val="0"/>
+              </a:spcAft>
+            </a:pPr>
+            <a:r>
+              <a:rPr sz="1050" b="0" i="0">
+                <a:solidFill>
+                  <a:srgbClr val="B4C7D2"/>
+                </a:solidFill>
+                <a:latin typeface="Arial"/>
+              </a:rPr>
+              <a:t>5</a:t>
+            </a:r>
+          </a:p>
+        </p:txBody>
+      </p:sp>
+      <p:cxnSp>
+        <p:nvCxnSpPr>
+          <p:cNvPr id="8" name="A-E07 line 6" descr="sci-ppt:o006"/>
+          <p:cNvCxnSpPr/>
+          <p:nvPr/>
+        </p:nvCxnSpPr>
+        <p:spPr>
+          <a:xfrm>
+            <a:off x="2084832" y="5029200"/>
+            <a:ext cx="0" cy="64008"/>
+          </a:xfrm>
+          <a:prstGeom prst="line">
+            <a:avLst/>
+          </a:prstGeom>
+          <a:ln w="12700">
+            <a:solidFill>
+              <a:srgbClr val="B4C7D2"/>
+            </a:solidFill>
+          </a:ln>
+          <a:effectLst/>
+        </p:spPr>
+      </p:cxnSp>
+      <p:cxnSp>
+        <p:nvCxnSpPr>
+          <p:cNvPr id="9" name="A-E07 line 7" descr="sci-ppt:o007"/>
+          <p:cNvCxnSpPr/>
+          <p:nvPr/>
+        </p:nvCxnSpPr>
+        <p:spPr>
+          <a:xfrm>
+            <a:off x="2084832" y="1371600"/>
+            <a:ext cx="0" cy="3657600"/>
+          </a:xfrm>
+          <a:prstGeom prst="line">
+            <a:avLst/>
+          </a:prstGeom>
+          <a:ln w="7620">
+            <a:solidFill>
+              <a:srgbClr val="2E4756"/>
+            </a:solidFill>
+          </a:ln>
+          <a:effectLst/>
+        </p:spPr>
+      </p:cxnSp>
+      <p:sp>
+        <p:nvSpPr>
+          <p:cNvPr id="10" name="A-E07 text 8" descr="sci-ppt:o008"/>
+          <p:cNvSpPr txBox="1"/>
+          <p:nvPr/>
+        </p:nvSpPr>
+        <p:spPr>
+          <a:xfrm>
+            <a:off x="1627632" y="5111496"/>
+            <a:ext cx="914400" cy="208407"/>
+          </a:xfrm>
+          <a:prstGeom prst="rect">
+            <a:avLst/>
+          </a:prstGeom>
+          <a:noFill/>
+          <a:effectLst/>
+        </p:spPr>
+        <p:txBody>
+          <a:bodyPr wrap="none" lIns="18288" rIns="18288" tIns="18288" bIns="18288" anchor="t">
+            <a:spAutoFit/>
+          </a:bodyPr>
+          <a:lstStyle/>
+          <a:p>
+            <a:pPr algn="ctr">
+              <a:spcAft>
+                <a:spcPts val="0"/>
+              </a:spcAft>
+            </a:pPr>
+            <a:r>
+              <a:rPr sz="1050" b="0" i="0">
+                <a:solidFill>
+                  <a:srgbClr val="B4C7D2"/>
+                </a:solidFill>
+                <a:latin typeface="Arial"/>
+              </a:rPr>
+              <a:t>10</a:t>
+            </a:r>
+          </a:p>
+        </p:txBody>
+      </p:sp>
+      <p:cxnSp>
+        <p:nvCxnSpPr>
+          <p:cNvPr id="11" name="A-E07 line 9" descr="sci-ppt:o009"/>
+          <p:cNvCxnSpPr/>
+          <p:nvPr/>
+        </p:nvCxnSpPr>
+        <p:spPr>
+          <a:xfrm>
+            <a:off x="3255264" y="5029200"/>
+            <a:ext cx="0" cy="64008"/>
+          </a:xfrm>
+          <a:prstGeom prst="line">
+            <a:avLst/>
+          </a:prstGeom>
+          <a:ln w="12700">
+            <a:solidFill>
+              <a:srgbClr val="B4C7D2"/>
+            </a:solidFill>
+          </a:ln>
+          <a:effectLst/>
+        </p:spPr>
+      </p:cxnSp>
+      <p:cxnSp>
+        <p:nvCxnSpPr>
+          <p:cNvPr id="12" name="A-E07 line 10" descr="sci-ppt:o010"/>
+          <p:cNvCxnSpPr/>
+          <p:nvPr/>
+        </p:nvCxnSpPr>
+        <p:spPr>
+          <a:xfrm>
+            <a:off x="3255264" y="1371600"/>
+            <a:ext cx="0" cy="3657600"/>
+          </a:xfrm>
+          <a:prstGeom prst="line">
+            <a:avLst/>
+          </a:prstGeom>
+          <a:ln w="7620">
+            <a:solidFill>
+              <a:srgbClr val="2E4756"/>
+            </a:solidFill>
+          </a:ln>
+          <a:effectLst/>
+        </p:spPr>
+      </p:cxnSp>
+      <p:sp>
+        <p:nvSpPr>
+          <p:cNvPr id="13" name="A-E07 text 11" descr="sci-ppt:o011"/>
+          <p:cNvSpPr txBox="1"/>
+          <p:nvPr/>
+        </p:nvSpPr>
+        <p:spPr>
+          <a:xfrm>
+            <a:off x="2798064" y="5111496"/>
+            <a:ext cx="914400" cy="208407"/>
+          </a:xfrm>
+          <a:prstGeom prst="rect">
+            <a:avLst/>
+          </a:prstGeom>
+          <a:noFill/>
+          <a:effectLst/>
+        </p:spPr>
+        <p:txBody>
+          <a:bodyPr wrap="none" lIns="18288" rIns="18288" tIns="18288" bIns="18288" anchor="t">
+            <a:spAutoFit/>
+          </a:bodyPr>
+          <a:lstStyle/>
+          <a:p>
+            <a:pPr algn="ctr">
+              <a:spcAft>
+                <a:spcPts val="0"/>
+              </a:spcAft>
+            </a:pPr>
+            <a:r>
+              <a:rPr sz="1050" b="0" i="0">
+                <a:solidFill>
+                  <a:srgbClr val="B4C7D2"/>
+                </a:solidFill>
+                <a:latin typeface="Arial"/>
+              </a:rPr>
+              <a:t>15</a:t>
+            </a:r>
+          </a:p>
+        </p:txBody>
+      </p:sp>
+      <p:cxnSp>
+        <p:nvCxnSpPr>
+          <p:cNvPr id="14" name="A-E07 line 12" descr="sci-ppt:o012"/>
+          <p:cNvCxnSpPr/>
+          <p:nvPr/>
+        </p:nvCxnSpPr>
+        <p:spPr>
+          <a:xfrm>
+            <a:off x="4425696" y="5029200"/>
+            <a:ext cx="0" cy="64008"/>
+          </a:xfrm>
+          <a:prstGeom prst="line">
+            <a:avLst/>
+          </a:prstGeom>
+          <a:ln w="12700">
+            <a:solidFill>
+              <a:srgbClr val="B4C7D2"/>
+            </a:solidFill>
+          </a:ln>
+          <a:effectLst/>
+        </p:spPr>
+      </p:cxnSp>
+      <p:cxnSp>
+        <p:nvCxnSpPr>
+          <p:cNvPr id="15" name="A-E07 line 13" descr="sci-ppt:o013"/>
+          <p:cNvCxnSpPr/>
+          <p:nvPr/>
+        </p:nvCxnSpPr>
+        <p:spPr>
+          <a:xfrm>
+            <a:off x="4425696" y="1371600"/>
+            <a:ext cx="0" cy="3657600"/>
+          </a:xfrm>
+          <a:prstGeom prst="line">
+            <a:avLst/>
+          </a:prstGeom>
+          <a:ln w="7620">
+            <a:solidFill>
+              <a:srgbClr val="2E4756"/>
+            </a:solidFill>
+          </a:ln>
+          <a:effectLst/>
+        </p:spPr>
+      </p:cxnSp>
+      <p:sp>
+        <p:nvSpPr>
+          <p:cNvPr id="16" name="A-E07 text 14" descr="sci-ppt:o014"/>
+          <p:cNvSpPr txBox="1"/>
+          <p:nvPr/>
+        </p:nvSpPr>
+        <p:spPr>
+          <a:xfrm>
+            <a:off x="3968496" y="5111496"/>
+            <a:ext cx="914400" cy="208407"/>
+          </a:xfrm>
+          <a:prstGeom prst="rect">
+            <a:avLst/>
+          </a:prstGeom>
+          <a:noFill/>
+          <a:effectLst/>
+        </p:spPr>
+        <p:txBody>
+          <a:bodyPr wrap="none" lIns="18288" rIns="18288" tIns="18288" bIns="18288" anchor="t">
+            <a:spAutoFit/>
+          </a:bodyPr>
+          <a:lstStyle/>
+          <a:p>
+            <a:pPr algn="ctr">
+              <a:spcAft>
+                <a:spcPts val="0"/>
+              </a:spcAft>
+            </a:pPr>
+            <a:r>
+              <a:rPr sz="1050" b="0" i="0">
+                <a:solidFill>
+                  <a:srgbClr val="B4C7D2"/>
+                </a:solidFill>
+                <a:latin typeface="Arial"/>
+              </a:rPr>
+              <a:t>20</a:t>
+            </a:r>
+          </a:p>
+        </p:txBody>
+      </p:sp>
+      <p:cxnSp>
+        <p:nvCxnSpPr>
+          <p:cNvPr id="17" name="A-E07 line 15" descr="sci-ppt:o015"/>
+          <p:cNvCxnSpPr/>
+          <p:nvPr/>
+        </p:nvCxnSpPr>
+        <p:spPr>
+          <a:xfrm>
+            <a:off x="5596128" y="5029200"/>
+            <a:ext cx="0" cy="64008"/>
+          </a:xfrm>
+          <a:prstGeom prst="line">
+            <a:avLst/>
+          </a:prstGeom>
+          <a:ln w="12700">
+            <a:solidFill>
+              <a:srgbClr val="B4C7D2"/>
+            </a:solidFill>
+          </a:ln>
+          <a:effectLst/>
+        </p:spPr>
+      </p:cxnSp>
+      <p:cxnSp>
+        <p:nvCxnSpPr>
+          <p:cNvPr id="18" name="A-E07 line 16" descr="sci-ppt:o016"/>
+          <p:cNvCxnSpPr/>
+          <p:nvPr/>
+        </p:nvCxnSpPr>
+        <p:spPr>
+          <a:xfrm>
+            <a:off x="5596128" y="1371600"/>
+            <a:ext cx="0" cy="3657600"/>
+          </a:xfrm>
+          <a:prstGeom prst="line">
+            <a:avLst/>
+          </a:prstGeom>
+          <a:ln w="7620">
+            <a:solidFill>
+              <a:srgbClr val="2E4756"/>
+            </a:solidFill>
+          </a:ln>
+          <a:effectLst/>
+        </p:spPr>
+      </p:cxnSp>
+      <p:sp>
+        <p:nvSpPr>
+          <p:cNvPr id="19" name="A-E07 text 17" descr="sci-ppt:o017"/>
+          <p:cNvSpPr txBox="1"/>
+          <p:nvPr/>
+        </p:nvSpPr>
+        <p:spPr>
+          <a:xfrm>
+            <a:off x="5138928" y="5111496"/>
+            <a:ext cx="914400" cy="208407"/>
+          </a:xfrm>
+          <a:prstGeom prst="rect">
+            <a:avLst/>
+          </a:prstGeom>
+          <a:noFill/>
+          <a:effectLst/>
+        </p:spPr>
+        <p:txBody>
+          <a:bodyPr wrap="none" lIns="18288" rIns="18288" tIns="18288" bIns="18288" anchor="t">
+            <a:spAutoFit/>
+          </a:bodyPr>
+          <a:lstStyle/>
+          <a:p>
+            <a:pPr algn="ctr">
+              <a:spcAft>
+                <a:spcPts val="0"/>
+              </a:spcAft>
+            </a:pPr>
+            <a:r>
+              <a:rPr sz="1050" b="0" i="0">
+                <a:solidFill>
+                  <a:srgbClr val="B4C7D2"/>
+                </a:solidFill>
+                <a:latin typeface="Arial"/>
+              </a:rPr>
+              <a:t>25</a:t>
+            </a:r>
+          </a:p>
+        </p:txBody>
+      </p:sp>
+      <p:cxnSp>
+        <p:nvCxnSpPr>
+          <p:cNvPr id="20" name="A-E07 line 18" descr="sci-ppt:o018"/>
+          <p:cNvCxnSpPr/>
+          <p:nvPr/>
+        </p:nvCxnSpPr>
+        <p:spPr>
+          <a:xfrm>
+            <a:off x="6766560" y="5029200"/>
+            <a:ext cx="0" cy="64008"/>
+          </a:xfrm>
+          <a:prstGeom prst="line">
+            <a:avLst/>
+          </a:prstGeom>
+          <a:ln w="12700">
+            <a:solidFill>
+              <a:srgbClr val="B4C7D2"/>
+            </a:solidFill>
+          </a:ln>
+          <a:effectLst/>
+        </p:spPr>
+      </p:cxnSp>
+      <p:cxnSp>
+        <p:nvCxnSpPr>
+          <p:cNvPr id="21" name="A-E07 line 19" descr="sci-ppt:o019"/>
+          <p:cNvCxnSpPr/>
+          <p:nvPr/>
+        </p:nvCxnSpPr>
+        <p:spPr>
+          <a:xfrm>
+            <a:off x="6766560" y="1371600"/>
+            <a:ext cx="0" cy="3657600"/>
+          </a:xfrm>
+          <a:prstGeom prst="line">
+            <a:avLst/>
+          </a:prstGeom>
+          <a:ln w="7620">
+            <a:solidFill>
+              <a:srgbClr val="2E4756"/>
+            </a:solidFill>
+          </a:ln>
+          <a:effectLst/>
+        </p:spPr>
+      </p:cxnSp>
+      <p:sp>
+        <p:nvSpPr>
+          <p:cNvPr id="22" name="A-E07 text 20" descr="sci-ppt:o020"/>
+          <p:cNvSpPr txBox="1"/>
+          <p:nvPr/>
+        </p:nvSpPr>
+        <p:spPr>
+          <a:xfrm>
+            <a:off x="6309360" y="5111496"/>
+            <a:ext cx="914400" cy="208407"/>
+          </a:xfrm>
+          <a:prstGeom prst="rect">
+            <a:avLst/>
+          </a:prstGeom>
+          <a:noFill/>
+          <a:effectLst/>
+        </p:spPr>
+        <p:txBody>
+          <a:bodyPr wrap="none" lIns="18288" rIns="18288" tIns="18288" bIns="18288" anchor="t">
+            <a:spAutoFit/>
+          </a:bodyPr>
+          <a:lstStyle/>
+          <a:p>
+            <a:pPr algn="ctr">
+              <a:spcAft>
+                <a:spcPts val="0"/>
+              </a:spcAft>
+            </a:pPr>
+            <a:r>
+              <a:rPr sz="1050" b="0" i="0">
+                <a:solidFill>
+                  <a:srgbClr val="B4C7D2"/>
+                </a:solidFill>
+                <a:latin typeface="Arial"/>
+              </a:rPr>
+              <a:t>30</a:t>
+            </a:r>
+          </a:p>
+        </p:txBody>
+      </p:sp>
+      <p:cxnSp>
+        <p:nvCxnSpPr>
+          <p:cNvPr id="23" name="A-E07 line 21" descr="sci-ppt:o021"/>
+          <p:cNvCxnSpPr/>
+          <p:nvPr/>
+        </p:nvCxnSpPr>
+        <p:spPr>
+          <a:xfrm>
+            <a:off x="850392" y="5029200"/>
+            <a:ext cx="64008" cy="0"/>
+          </a:xfrm>
+          <a:prstGeom prst="line">
+            <a:avLst/>
+          </a:prstGeom>
+          <a:ln w="12700">
+            <a:solidFill>
+              <a:srgbClr val="B4C7D2"/>
+            </a:solidFill>
+          </a:ln>
+          <a:effectLst/>
+        </p:spPr>
+      </p:cxnSp>
+      <p:cxnSp>
+        <p:nvCxnSpPr>
+          <p:cNvPr id="24" name="A-E07 line 22" descr="sci-ppt:o022"/>
+          <p:cNvCxnSpPr/>
+          <p:nvPr/>
+        </p:nvCxnSpPr>
+        <p:spPr>
+          <a:xfrm>
+            <a:off x="850392" y="4325815"/>
+            <a:ext cx="64008" cy="0"/>
+          </a:xfrm>
+          <a:prstGeom prst="line">
+            <a:avLst/>
+          </a:prstGeom>
+          <a:ln w="12700">
+            <a:solidFill>
+              <a:srgbClr val="B4C7D2"/>
+            </a:solidFill>
+          </a:ln>
+          <a:effectLst/>
+        </p:spPr>
+      </p:cxnSp>
+      <p:cxnSp>
+        <p:nvCxnSpPr>
+          <p:cNvPr id="25" name="A-E07 line 23" descr="sci-ppt:o023"/>
+          <p:cNvCxnSpPr/>
+          <p:nvPr/>
+        </p:nvCxnSpPr>
+        <p:spPr>
+          <a:xfrm>
+            <a:off x="914400" y="4325815"/>
+            <a:ext cx="5852160" cy="0"/>
+          </a:xfrm>
+          <a:prstGeom prst="line">
+            <a:avLst/>
+          </a:prstGeom>
+          <a:ln w="7620">
+            <a:solidFill>
+              <a:srgbClr val="2E4756"/>
+            </a:solidFill>
+          </a:ln>
+          <a:effectLst/>
+        </p:spPr>
+      </p:cxnSp>
+      <p:sp>
+        <p:nvSpPr>
+          <p:cNvPr id="26" name="A-E07 text 24" descr="sci-ppt:o024"/>
+          <p:cNvSpPr txBox="1"/>
+          <p:nvPr/>
+        </p:nvSpPr>
+        <p:spPr>
+          <a:xfrm>
+            <a:off x="45720" y="4243519"/>
+            <a:ext cx="777240" cy="208407"/>
+          </a:xfrm>
+          <a:prstGeom prst="rect">
+            <a:avLst/>
+          </a:prstGeom>
+          <a:noFill/>
+          <a:effectLst/>
+        </p:spPr>
+        <p:txBody>
+          <a:bodyPr wrap="none" lIns="18288" rIns="18288" tIns="18288" bIns="18288" anchor="t">
+            <a:spAutoFit/>
+          </a:bodyPr>
+          <a:lstStyle/>
+          <a:p>
+            <a:pPr algn="r">
+              <a:spcAft>
+                <a:spcPts val="0"/>
+              </a:spcAft>
+            </a:pPr>
+            <a:r>
+              <a:rPr sz="1050" b="0" i="0">
+                <a:solidFill>
+                  <a:srgbClr val="B4C7D2"/>
+                </a:solidFill>
+                <a:latin typeface="Arial"/>
+              </a:rPr>
+              <a:t>1</a:t>
+            </a:r>
+          </a:p>
+        </p:txBody>
+      </p:sp>
+      <p:cxnSp>
+        <p:nvCxnSpPr>
+          <p:cNvPr id="27" name="A-E07 line 25" descr="sci-ppt:o025"/>
+          <p:cNvCxnSpPr/>
+          <p:nvPr/>
+        </p:nvCxnSpPr>
+        <p:spPr>
+          <a:xfrm>
+            <a:off x="850392" y="3622430"/>
+            <a:ext cx="64008" cy="0"/>
+          </a:xfrm>
+          <a:prstGeom prst="line">
+            <a:avLst/>
+          </a:prstGeom>
+          <a:ln w="12700">
+            <a:solidFill>
+              <a:srgbClr val="B4C7D2"/>
+            </a:solidFill>
+          </a:ln>
+          <a:effectLst/>
+        </p:spPr>
+      </p:cxnSp>
+      <p:cxnSp>
+        <p:nvCxnSpPr>
+          <p:cNvPr id="28" name="A-E07 line 26" descr="sci-ppt:o026"/>
+          <p:cNvCxnSpPr/>
+          <p:nvPr/>
+        </p:nvCxnSpPr>
+        <p:spPr>
+          <a:xfrm>
+            <a:off x="914400" y="3622430"/>
+            <a:ext cx="5852160" cy="0"/>
+          </a:xfrm>
+          <a:prstGeom prst="line">
+            <a:avLst/>
+          </a:prstGeom>
+          <a:ln w="7620">
+            <a:solidFill>
+              <a:srgbClr val="2E4756"/>
+            </a:solidFill>
+          </a:ln>
+          <a:effectLst/>
+        </p:spPr>
+      </p:cxnSp>
+      <p:sp>
+        <p:nvSpPr>
+          <p:cNvPr id="29" name="A-E07 text 27" descr="sci-ppt:o027"/>
+          <p:cNvSpPr txBox="1"/>
+          <p:nvPr/>
+        </p:nvSpPr>
+        <p:spPr>
+          <a:xfrm>
+            <a:off x="45720" y="3540134"/>
+            <a:ext cx="777240" cy="208407"/>
+          </a:xfrm>
+          <a:prstGeom prst="rect">
+            <a:avLst/>
+          </a:prstGeom>
+          <a:noFill/>
+          <a:effectLst/>
+        </p:spPr>
+        <p:txBody>
+          <a:bodyPr wrap="none" lIns="18288" rIns="18288" tIns="18288" bIns="18288" anchor="t">
+            <a:spAutoFit/>
+          </a:bodyPr>
+          <a:lstStyle/>
+          <a:p>
+            <a:pPr algn="r">
+              <a:spcAft>
+                <a:spcPts val="0"/>
+              </a:spcAft>
+            </a:pPr>
+            <a:r>
+              <a:rPr sz="1050" b="0" i="0">
+                <a:solidFill>
+                  <a:srgbClr val="B4C7D2"/>
+                </a:solidFill>
+                <a:latin typeface="Arial"/>
+              </a:rPr>
+              <a:t>2</a:t>
+            </a:r>
+          </a:p>
+        </p:txBody>
+      </p:sp>
+      <p:cxnSp>
+        <p:nvCxnSpPr>
+          <p:cNvPr id="30" name="A-E07 line 28" descr="sci-ppt:o028"/>
+          <p:cNvCxnSpPr/>
+          <p:nvPr/>
+        </p:nvCxnSpPr>
+        <p:spPr>
+          <a:xfrm>
+            <a:off x="850392" y="2919046"/>
+            <a:ext cx="64008" cy="0"/>
+          </a:xfrm>
+          <a:prstGeom prst="line">
+            <a:avLst/>
+          </a:prstGeom>
+          <a:ln w="12700">
+            <a:solidFill>
+              <a:srgbClr val="B4C7D2"/>
+            </a:solidFill>
+          </a:ln>
+          <a:effectLst/>
+        </p:spPr>
+      </p:cxnSp>
+      <p:cxnSp>
+        <p:nvCxnSpPr>
+          <p:cNvPr id="31" name="A-E07 line 29" descr="sci-ppt:o029"/>
+          <p:cNvCxnSpPr/>
+          <p:nvPr/>
+        </p:nvCxnSpPr>
+        <p:spPr>
+          <a:xfrm>
+            <a:off x="914400" y="2919046"/>
+            <a:ext cx="5852160" cy="0"/>
+          </a:xfrm>
+          <a:prstGeom prst="line">
+            <a:avLst/>
+          </a:prstGeom>
+          <a:ln w="7620">
+            <a:solidFill>
+              <a:srgbClr val="2E4756"/>
+            </a:solidFill>
+          </a:ln>
+          <a:effectLst/>
+        </p:spPr>
+      </p:cxnSp>
+      <p:sp>
+        <p:nvSpPr>
+          <p:cNvPr id="32" name="A-E07 text 30" descr="sci-ppt:o030"/>
+          <p:cNvSpPr txBox="1"/>
+          <p:nvPr/>
+        </p:nvSpPr>
+        <p:spPr>
+          <a:xfrm>
+            <a:off x="45720" y="2836750"/>
+            <a:ext cx="777240" cy="208407"/>
+          </a:xfrm>
+          <a:prstGeom prst="rect">
+            <a:avLst/>
+          </a:prstGeom>
+          <a:noFill/>
+          <a:effectLst/>
+        </p:spPr>
+        <p:txBody>
+          <a:bodyPr wrap="none" lIns="18288" rIns="18288" tIns="18288" bIns="18288" anchor="t">
+            <a:spAutoFit/>
+          </a:bodyPr>
+          <a:lstStyle/>
+          <a:p>
+            <a:pPr algn="r">
+              <a:spcAft>
+                <a:spcPts val="0"/>
+              </a:spcAft>
+            </a:pPr>
+            <a:r>
+              <a:rPr sz="1050" b="0" i="0">
+                <a:solidFill>
+                  <a:srgbClr val="B4C7D2"/>
+                </a:solidFill>
+                <a:latin typeface="Arial"/>
+              </a:rPr>
+              <a:t>3</a:t>
+            </a:r>
+          </a:p>
+        </p:txBody>
+      </p:sp>
+      <p:cxnSp>
+        <p:nvCxnSpPr>
+          <p:cNvPr id="33" name="A-E07 line 31" descr="sci-ppt:o031"/>
+          <p:cNvCxnSpPr/>
+          <p:nvPr/>
+        </p:nvCxnSpPr>
+        <p:spPr>
+          <a:xfrm>
+            <a:off x="850392" y="2215661"/>
+            <a:ext cx="64008" cy="0"/>
+          </a:xfrm>
+          <a:prstGeom prst="line">
+            <a:avLst/>
+          </a:prstGeom>
+          <a:ln w="12700">
+            <a:solidFill>
+              <a:srgbClr val="B4C7D2"/>
+            </a:solidFill>
+          </a:ln>
+          <a:effectLst/>
+        </p:spPr>
+      </p:cxnSp>
+      <p:cxnSp>
+        <p:nvCxnSpPr>
+          <p:cNvPr id="34" name="A-E07 line 32" descr="sci-ppt:o032"/>
+          <p:cNvCxnSpPr/>
+          <p:nvPr/>
+        </p:nvCxnSpPr>
+        <p:spPr>
+          <a:xfrm>
+            <a:off x="914400" y="2215661"/>
+            <a:ext cx="5852160" cy="0"/>
+          </a:xfrm>
+          <a:prstGeom prst="line">
+            <a:avLst/>
+          </a:prstGeom>
+          <a:ln w="7620">
+            <a:solidFill>
+              <a:srgbClr val="2E4756"/>
+            </a:solidFill>
+          </a:ln>
+          <a:effectLst/>
+        </p:spPr>
+      </p:cxnSp>
+      <p:sp>
+        <p:nvSpPr>
+          <p:cNvPr id="35" name="A-E07 text 33" descr="sci-ppt:o033"/>
+          <p:cNvSpPr txBox="1"/>
+          <p:nvPr/>
+        </p:nvSpPr>
+        <p:spPr>
+          <a:xfrm>
+            <a:off x="45720" y="2133365"/>
+            <a:ext cx="777240" cy="208407"/>
+          </a:xfrm>
+          <a:prstGeom prst="rect">
+            <a:avLst/>
+          </a:prstGeom>
+          <a:noFill/>
+          <a:effectLst/>
+        </p:spPr>
+        <p:txBody>
+          <a:bodyPr wrap="none" lIns="18288" rIns="18288" tIns="18288" bIns="18288" anchor="t">
+            <a:spAutoFit/>
+          </a:bodyPr>
+          <a:lstStyle/>
+          <a:p>
+            <a:pPr algn="r">
+              <a:spcAft>
+                <a:spcPts val="0"/>
+              </a:spcAft>
+            </a:pPr>
+            <a:r>
+              <a:rPr sz="1050" b="0" i="0">
+                <a:solidFill>
+                  <a:srgbClr val="B4C7D2"/>
+                </a:solidFill>
+                <a:latin typeface="Arial"/>
+              </a:rPr>
+              <a:t>4</a:t>
+            </a:r>
+          </a:p>
+        </p:txBody>
+      </p:sp>
+      <p:cxnSp>
+        <p:nvCxnSpPr>
+          <p:cNvPr id="36" name="A-E07 line 34" descr="sci-ppt:o034"/>
+          <p:cNvCxnSpPr/>
+          <p:nvPr/>
+        </p:nvCxnSpPr>
+        <p:spPr>
+          <a:xfrm>
+            <a:off x="850392" y="1512276"/>
+            <a:ext cx="64008" cy="0"/>
+          </a:xfrm>
+          <a:prstGeom prst="line">
+            <a:avLst/>
+          </a:prstGeom>
+          <a:ln w="12700">
+            <a:solidFill>
+              <a:srgbClr val="B4C7D2"/>
+            </a:solidFill>
+          </a:ln>
+          <a:effectLst/>
+        </p:spPr>
+      </p:cxnSp>
+      <p:cxnSp>
+        <p:nvCxnSpPr>
+          <p:cNvPr id="37" name="A-E07 line 35" descr="sci-ppt:o035"/>
+          <p:cNvCxnSpPr/>
+          <p:nvPr/>
+        </p:nvCxnSpPr>
+        <p:spPr>
+          <a:xfrm>
+            <a:off x="914400" y="1512276"/>
+            <a:ext cx="5852160" cy="0"/>
+          </a:xfrm>
+          <a:prstGeom prst="line">
+            <a:avLst/>
+          </a:prstGeom>
+          <a:ln w="7620">
+            <a:solidFill>
+              <a:srgbClr val="2E4756"/>
+            </a:solidFill>
+          </a:ln>
+          <a:effectLst/>
+        </p:spPr>
+      </p:cxnSp>
+      <p:sp>
+        <p:nvSpPr>
+          <p:cNvPr id="38" name="A-E07 text 36" descr="sci-ppt:o036"/>
+          <p:cNvSpPr txBox="1"/>
+          <p:nvPr/>
+        </p:nvSpPr>
+        <p:spPr>
+          <a:xfrm>
+            <a:off x="45720" y="1429980"/>
+            <a:ext cx="777240" cy="208407"/>
+          </a:xfrm>
+          <a:prstGeom prst="rect">
+            <a:avLst/>
+          </a:prstGeom>
+          <a:noFill/>
+          <a:effectLst/>
+        </p:spPr>
+        <p:txBody>
+          <a:bodyPr wrap="none" lIns="18288" rIns="18288" tIns="18288" bIns="18288" anchor="t">
+            <a:spAutoFit/>
+          </a:bodyPr>
+          <a:lstStyle/>
+          <a:p>
+            <a:pPr algn="r">
+              <a:spcAft>
+                <a:spcPts val="0"/>
+              </a:spcAft>
+            </a:pPr>
+            <a:r>
+              <a:rPr sz="1050" b="0" i="0">
+                <a:solidFill>
+                  <a:srgbClr val="B4C7D2"/>
+                </a:solidFill>
+                <a:latin typeface="Arial"/>
+              </a:rPr>
+              <a:t>5</a:t>
+            </a:r>
+          </a:p>
+        </p:txBody>
+      </p:sp>
+      <p:sp>
+        <p:nvSpPr>
+          <p:cNvPr id="39" name="A-E07 text 37" descr="sci-ppt:o037"/>
+          <p:cNvSpPr txBox="1"/>
+          <p:nvPr/>
+        </p:nvSpPr>
+        <p:spPr>
+          <a:xfrm>
+            <a:off x="914400" y="5312664"/>
+            <a:ext cx="5852160" cy="231648"/>
+          </a:xfrm>
+          <a:prstGeom prst="rect">
+            <a:avLst/>
+          </a:prstGeom>
+          <a:noFill/>
+          <a:effectLst/>
+        </p:spPr>
+        <p:txBody>
+          <a:bodyPr wrap="none" lIns="18288" rIns="18288" tIns="18288" bIns="18288" anchor="t">
+            <a:spAutoFit/>
+          </a:bodyPr>
+          <a:lstStyle/>
+          <a:p>
+            <a:pPr algn="ctr">
+              <a:spcAft>
+                <a:spcPts val="0"/>
+              </a:spcAft>
+            </a:pPr>
+            <a:r>
+              <a:rPr sz="1200" b="0" i="0">
+                <a:solidFill>
+                  <a:srgbClr val="E7F0F3"/>
+                </a:solidFill>
+                <a:latin typeface="Arial"/>
+              </a:rPr>
+              <a:t>cavity radius R  (µm)</a:t>
+            </a:r>
+          </a:p>
+        </p:txBody>
+      </p:sp>
+      <p:sp>
+        <p:nvSpPr>
+          <p:cNvPr id="40" name="A-E07 text 38" descr="sci-ppt:o038"/>
+          <p:cNvSpPr txBox="1"/>
+          <p:nvPr/>
+        </p:nvSpPr>
+        <p:spPr>
+          <a:xfrm>
+            <a:off x="365760" y="1024128"/>
+            <a:ext cx="5852160" cy="231648"/>
+          </a:xfrm>
+          <a:prstGeom prst="rect">
+            <a:avLst/>
+          </a:prstGeom>
+          <a:noFill/>
+          <a:effectLst/>
+        </p:spPr>
+        <p:txBody>
+          <a:bodyPr wrap="none" lIns="18288" rIns="18288" tIns="18288" bIns="18288" anchor="t">
+            <a:spAutoFit/>
+          </a:bodyPr>
+          <a:lstStyle/>
+          <a:p>
+            <a:pPr algn="l">
+              <a:spcAft>
+                <a:spcPts val="0"/>
+              </a:spcAft>
+            </a:pPr>
+            <a:r>
+              <a:rPr sz="1200" b="0" i="0">
+                <a:solidFill>
+                  <a:srgbClr val="E7F0F3"/>
+                </a:solidFill>
+                <a:latin typeface="Arial"/>
+              </a:rPr>
+              <a:t>stored work W_g  (nJ)</a:t>
+            </a:r>
+          </a:p>
+        </p:txBody>
+      </p:sp>
+      <p:sp>
+        <p:nvSpPr>
+          <p:cNvPr id="41" name="A-E07 polygon 39" descr="sci-ppt:o039"/>
           <p:cNvSpPr/>
           <p:nvPr/>
         </p:nvSpPr>
         <p:spPr>
           <a:xfrm>
-            <a:off x="1380744" y="1371600"/>
-            <a:ext cx="530352" cy="530352"/>
+            <a:off x="914400" y="1852687"/>
+            <a:ext cx="5852160" cy="3176513"/>
+          </a:xfrm>
+          <a:custGeom>
+            <a:avLst/>
+            <a:gdLst/>
+            <a:ahLst/>
+            <a:cxnLst/>
+            <a:rect l="l" t="t" r="r" b="b"/>
+            <a:pathLst>
+              <a:path w="5852160" h="3176513">
+                <a:moveTo>
+                  <a:pt x="0" y="3176513"/>
+                </a:moveTo>
+                <a:lnTo>
+                  <a:pt x="49177" y="3176434"/>
+                </a:lnTo>
+                <a:lnTo>
+                  <a:pt x="98355" y="3176196"/>
+                </a:lnTo>
+                <a:lnTo>
+                  <a:pt x="147533" y="3175793"/>
+                </a:lnTo>
+                <a:lnTo>
+                  <a:pt x="196711" y="3175222"/>
+                </a:lnTo>
+                <a:lnTo>
+                  <a:pt x="245889" y="3174476"/>
+                </a:lnTo>
+                <a:lnTo>
+                  <a:pt x="295066" y="3173550"/>
+                </a:lnTo>
+                <a:lnTo>
+                  <a:pt x="344244" y="3172438"/>
+                </a:lnTo>
+                <a:lnTo>
+                  <a:pt x="393422" y="3171134"/>
+                </a:lnTo>
+                <a:lnTo>
+                  <a:pt x="442600" y="3169630"/>
+                </a:lnTo>
+                <a:lnTo>
+                  <a:pt x="491778" y="3167921"/>
+                </a:lnTo>
+                <a:lnTo>
+                  <a:pt x="540955" y="3166000"/>
+                </a:lnTo>
+                <a:lnTo>
+                  <a:pt x="590133" y="3163858"/>
+                </a:lnTo>
+                <a:lnTo>
+                  <a:pt x="639311" y="3161490"/>
+                </a:lnTo>
+                <a:lnTo>
+                  <a:pt x="688489" y="3158888"/>
+                </a:lnTo>
+                <a:lnTo>
+                  <a:pt x="737667" y="3156044"/>
+                </a:lnTo>
+                <a:lnTo>
+                  <a:pt x="786845" y="3152951"/>
+                </a:lnTo>
+                <a:lnTo>
+                  <a:pt x="836022" y="3149602"/>
+                </a:lnTo>
+                <a:lnTo>
+                  <a:pt x="885200" y="3145989"/>
+                </a:lnTo>
+                <a:lnTo>
+                  <a:pt x="934378" y="3142103"/>
+                </a:lnTo>
+                <a:lnTo>
+                  <a:pt x="983556" y="3137939"/>
+                </a:lnTo>
+                <a:lnTo>
+                  <a:pt x="1032734" y="3133487"/>
+                </a:lnTo>
+                <a:lnTo>
+                  <a:pt x="1081911" y="3128740"/>
+                </a:lnTo>
+                <a:lnTo>
+                  <a:pt x="1131089" y="3123690"/>
+                </a:lnTo>
+                <a:lnTo>
+                  <a:pt x="1180267" y="3118330"/>
+                </a:lnTo>
+                <a:lnTo>
+                  <a:pt x="1229445" y="3112651"/>
+                </a:lnTo>
+                <a:lnTo>
+                  <a:pt x="1278623" y="3106646"/>
+                </a:lnTo>
+                <a:lnTo>
+                  <a:pt x="1327801" y="3100306"/>
+                </a:lnTo>
+                <a:lnTo>
+                  <a:pt x="1376978" y="3093624"/>
+                </a:lnTo>
+                <a:lnTo>
+                  <a:pt x="1426156" y="3086592"/>
+                </a:lnTo>
+                <a:lnTo>
+                  <a:pt x="1475334" y="3079201"/>
+                </a:lnTo>
+                <a:lnTo>
+                  <a:pt x="1524512" y="3071444"/>
+                </a:lnTo>
+                <a:lnTo>
+                  <a:pt x="1573690" y="3063313"/>
+                </a:lnTo>
+                <a:lnTo>
+                  <a:pt x="1622867" y="3054800"/>
+                </a:lnTo>
+                <a:lnTo>
+                  <a:pt x="1672045" y="3045896"/>
+                </a:lnTo>
+                <a:lnTo>
+                  <a:pt x="1721223" y="3036593"/>
+                </a:lnTo>
+                <a:lnTo>
+                  <a:pt x="1770401" y="3026885"/>
+                </a:lnTo>
+                <a:lnTo>
+                  <a:pt x="1819579" y="3016761"/>
+                </a:lnTo>
+                <a:lnTo>
+                  <a:pt x="1868756" y="3006216"/>
+                </a:lnTo>
+                <a:lnTo>
+                  <a:pt x="1917934" y="2995239"/>
+                </a:lnTo>
+                <a:lnTo>
+                  <a:pt x="1967112" y="2983824"/>
+                </a:lnTo>
+                <a:lnTo>
+                  <a:pt x="2016290" y="2971961"/>
+                </a:lnTo>
+                <a:lnTo>
+                  <a:pt x="2065468" y="2959644"/>
+                </a:lnTo>
+                <a:lnTo>
+                  <a:pt x="2114646" y="2946864"/>
+                </a:lnTo>
+                <a:lnTo>
+                  <a:pt x="2163823" y="2933612"/>
+                </a:lnTo>
+                <a:lnTo>
+                  <a:pt x="2213001" y="2919881"/>
+                </a:lnTo>
+                <a:lnTo>
+                  <a:pt x="2262179" y="2905663"/>
+                </a:lnTo>
+                <a:lnTo>
+                  <a:pt x="2311357" y="2890949"/>
+                </a:lnTo>
+                <a:lnTo>
+                  <a:pt x="2360535" y="2875731"/>
+                </a:lnTo>
+                <a:lnTo>
+                  <a:pt x="2409712" y="2860002"/>
+                </a:lnTo>
+                <a:lnTo>
+                  <a:pt x="2458890" y="2843753"/>
+                </a:lnTo>
+                <a:lnTo>
+                  <a:pt x="2508068" y="2826975"/>
+                </a:lnTo>
+                <a:lnTo>
+                  <a:pt x="2557246" y="2809661"/>
+                </a:lnTo>
+                <a:lnTo>
+                  <a:pt x="2606424" y="2791803"/>
+                </a:lnTo>
+                <a:lnTo>
+                  <a:pt x="2655602" y="2773392"/>
+                </a:lnTo>
+                <a:lnTo>
+                  <a:pt x="2704779" y="2754421"/>
+                </a:lnTo>
+                <a:lnTo>
+                  <a:pt x="2753957" y="2734880"/>
+                </a:lnTo>
+                <a:lnTo>
+                  <a:pt x="2803135" y="2714763"/>
+                </a:lnTo>
+                <a:lnTo>
+                  <a:pt x="2852313" y="2694060"/>
+                </a:lnTo>
+                <a:lnTo>
+                  <a:pt x="2901491" y="2672764"/>
+                </a:lnTo>
+                <a:lnTo>
+                  <a:pt x="2950668" y="2650867"/>
+                </a:lnTo>
+                <a:lnTo>
+                  <a:pt x="2999846" y="2628360"/>
+                </a:lnTo>
+                <a:lnTo>
+                  <a:pt x="3049024" y="2605235"/>
+                </a:lnTo>
+                <a:lnTo>
+                  <a:pt x="3098202" y="2581484"/>
+                </a:lnTo>
+                <a:lnTo>
+                  <a:pt x="3147380" y="2557099"/>
+                </a:lnTo>
+                <a:lnTo>
+                  <a:pt x="3196557" y="2532071"/>
+                </a:lnTo>
+                <a:lnTo>
+                  <a:pt x="3245735" y="2506393"/>
+                </a:lnTo>
+                <a:lnTo>
+                  <a:pt x="3294913" y="2480057"/>
+                </a:lnTo>
+                <a:lnTo>
+                  <a:pt x="3344091" y="2453053"/>
+                </a:lnTo>
+                <a:lnTo>
+                  <a:pt x="3393269" y="2425375"/>
+                </a:lnTo>
+                <a:lnTo>
+                  <a:pt x="3442447" y="2397013"/>
+                </a:lnTo>
+                <a:lnTo>
+                  <a:pt x="3491624" y="2367960"/>
+                </a:lnTo>
+                <a:lnTo>
+                  <a:pt x="3540802" y="2338208"/>
+                </a:lnTo>
+                <a:lnTo>
+                  <a:pt x="3589980" y="2307747"/>
+                </a:lnTo>
+                <a:lnTo>
+                  <a:pt x="3639158" y="2276571"/>
+                </a:lnTo>
+                <a:lnTo>
+                  <a:pt x="3688336" y="2244671"/>
+                </a:lnTo>
+                <a:lnTo>
+                  <a:pt x="3737513" y="2212039"/>
+                </a:lnTo>
+                <a:lnTo>
+                  <a:pt x="3786691" y="2178666"/>
+                </a:lnTo>
+                <a:lnTo>
+                  <a:pt x="3835869" y="2144544"/>
+                </a:lnTo>
+                <a:lnTo>
+                  <a:pt x="3885047" y="2109666"/>
+                </a:lnTo>
+                <a:lnTo>
+                  <a:pt x="3934225" y="2074023"/>
+                </a:lnTo>
+                <a:lnTo>
+                  <a:pt x="3983403" y="2037606"/>
+                </a:lnTo>
+                <a:lnTo>
+                  <a:pt x="4032580" y="2000408"/>
+                </a:lnTo>
+                <a:lnTo>
+                  <a:pt x="4081758" y="1962421"/>
+                </a:lnTo>
+                <a:lnTo>
+                  <a:pt x="4130936" y="1923636"/>
+                </a:lnTo>
+                <a:lnTo>
+                  <a:pt x="4180114" y="1884045"/>
+                </a:lnTo>
+                <a:lnTo>
+                  <a:pt x="4229292" y="1843640"/>
+                </a:lnTo>
+                <a:lnTo>
+                  <a:pt x="4278469" y="1802413"/>
+                </a:lnTo>
+                <a:lnTo>
+                  <a:pt x="4327647" y="1760355"/>
+                </a:lnTo>
+                <a:lnTo>
+                  <a:pt x="4376825" y="1717459"/>
+                </a:lnTo>
+                <a:lnTo>
+                  <a:pt x="4426003" y="1673716"/>
+                </a:lnTo>
+                <a:lnTo>
+                  <a:pt x="4475181" y="1629118"/>
+                </a:lnTo>
+                <a:lnTo>
+                  <a:pt x="4524358" y="1583657"/>
+                </a:lnTo>
+                <a:lnTo>
+                  <a:pt x="4573536" y="1537324"/>
+                </a:lnTo>
+                <a:lnTo>
+                  <a:pt x="4622714" y="1490112"/>
+                </a:lnTo>
+                <a:lnTo>
+                  <a:pt x="4671892" y="1442012"/>
+                </a:lnTo>
+                <a:lnTo>
+                  <a:pt x="4721070" y="1393016"/>
+                </a:lnTo>
+                <a:lnTo>
+                  <a:pt x="4770248" y="1343116"/>
+                </a:lnTo>
+                <a:lnTo>
+                  <a:pt x="4819425" y="1292304"/>
+                </a:lnTo>
+                <a:lnTo>
+                  <a:pt x="4868603" y="1240571"/>
+                </a:lnTo>
+                <a:lnTo>
+                  <a:pt x="4917781" y="1187910"/>
+                </a:lnTo>
+                <a:lnTo>
+                  <a:pt x="4966959" y="1134311"/>
+                </a:lnTo>
+                <a:lnTo>
+                  <a:pt x="5016137" y="1079768"/>
+                </a:lnTo>
+                <a:lnTo>
+                  <a:pt x="5065314" y="1024271"/>
+                </a:lnTo>
+                <a:lnTo>
+                  <a:pt x="5114492" y="967813"/>
+                </a:lnTo>
+                <a:lnTo>
+                  <a:pt x="5163670" y="910386"/>
+                </a:lnTo>
+                <a:lnTo>
+                  <a:pt x="5212848" y="851980"/>
+                </a:lnTo>
+                <a:lnTo>
+                  <a:pt x="5262026" y="792588"/>
+                </a:lnTo>
+                <a:lnTo>
+                  <a:pt x="5311204" y="732203"/>
+                </a:lnTo>
+                <a:lnTo>
+                  <a:pt x="5360381" y="670815"/>
+                </a:lnTo>
+                <a:lnTo>
+                  <a:pt x="5409559" y="608416"/>
+                </a:lnTo>
+                <a:lnTo>
+                  <a:pt x="5458737" y="544998"/>
+                </a:lnTo>
+                <a:lnTo>
+                  <a:pt x="5507915" y="480554"/>
+                </a:lnTo>
+                <a:lnTo>
+                  <a:pt x="5557093" y="415074"/>
+                </a:lnTo>
+                <a:lnTo>
+                  <a:pt x="5606270" y="348551"/>
+                </a:lnTo>
+                <a:lnTo>
+                  <a:pt x="5655448" y="280977"/>
+                </a:lnTo>
+                <a:lnTo>
+                  <a:pt x="5704626" y="212343"/>
+                </a:lnTo>
+                <a:lnTo>
+                  <a:pt x="5753804" y="142641"/>
+                </a:lnTo>
+                <a:lnTo>
+                  <a:pt x="5802982" y="71862"/>
+                </a:lnTo>
+                <a:lnTo>
+                  <a:pt x="5852160" y="0"/>
+                </a:lnTo>
+                <a:lnTo>
+                  <a:pt x="5852160" y="3176513"/>
+                </a:lnTo>
+                <a:lnTo>
+                  <a:pt x="5802982" y="3176513"/>
+                </a:lnTo>
+                <a:lnTo>
+                  <a:pt x="5753804" y="3176513"/>
+                </a:lnTo>
+                <a:lnTo>
+                  <a:pt x="5704626" y="3176513"/>
+                </a:lnTo>
+                <a:lnTo>
+                  <a:pt x="5655448" y="3176513"/>
+                </a:lnTo>
+                <a:lnTo>
+                  <a:pt x="5606270" y="3176513"/>
+                </a:lnTo>
+                <a:lnTo>
+                  <a:pt x="5557093" y="3176513"/>
+                </a:lnTo>
+                <a:lnTo>
+                  <a:pt x="5507915" y="3176513"/>
+                </a:lnTo>
+                <a:lnTo>
+                  <a:pt x="5458737" y="3176513"/>
+                </a:lnTo>
+                <a:lnTo>
+                  <a:pt x="5409559" y="3176513"/>
+                </a:lnTo>
+                <a:lnTo>
+                  <a:pt x="5360381" y="3176513"/>
+                </a:lnTo>
+                <a:lnTo>
+                  <a:pt x="5311204" y="3176513"/>
+                </a:lnTo>
+                <a:lnTo>
+                  <a:pt x="5262026" y="3176513"/>
+                </a:lnTo>
+                <a:lnTo>
+                  <a:pt x="5212848" y="3176513"/>
+                </a:lnTo>
+                <a:lnTo>
+                  <a:pt x="5163670" y="3176513"/>
+                </a:lnTo>
+                <a:lnTo>
+                  <a:pt x="5114492" y="3176513"/>
+                </a:lnTo>
+                <a:lnTo>
+                  <a:pt x="5065314" y="3176513"/>
+                </a:lnTo>
+                <a:lnTo>
+                  <a:pt x="5016137" y="3176513"/>
+                </a:lnTo>
+                <a:lnTo>
+                  <a:pt x="4966959" y="3176513"/>
+                </a:lnTo>
+                <a:lnTo>
+                  <a:pt x="4917781" y="3176513"/>
+                </a:lnTo>
+                <a:lnTo>
+                  <a:pt x="4868603" y="3176513"/>
+                </a:lnTo>
+                <a:lnTo>
+                  <a:pt x="4819425" y="3176513"/>
+                </a:lnTo>
+                <a:lnTo>
+                  <a:pt x="4770248" y="3176513"/>
+                </a:lnTo>
+                <a:lnTo>
+                  <a:pt x="4721070" y="3176513"/>
+                </a:lnTo>
+                <a:lnTo>
+                  <a:pt x="4671892" y="3176513"/>
+                </a:lnTo>
+                <a:lnTo>
+                  <a:pt x="4622714" y="3176513"/>
+                </a:lnTo>
+                <a:lnTo>
+                  <a:pt x="4573536" y="3176513"/>
+                </a:lnTo>
+                <a:lnTo>
+                  <a:pt x="4524358" y="3176513"/>
+                </a:lnTo>
+                <a:lnTo>
+                  <a:pt x="4475181" y="3176513"/>
+                </a:lnTo>
+                <a:lnTo>
+                  <a:pt x="4426003" y="3176513"/>
+                </a:lnTo>
+                <a:lnTo>
+                  <a:pt x="4376825" y="3176513"/>
+                </a:lnTo>
+                <a:lnTo>
+                  <a:pt x="4327647" y="3176513"/>
+                </a:lnTo>
+                <a:lnTo>
+                  <a:pt x="4278469" y="3176513"/>
+                </a:lnTo>
+                <a:lnTo>
+                  <a:pt x="4229292" y="3176513"/>
+                </a:lnTo>
+                <a:lnTo>
+                  <a:pt x="4180114" y="3176513"/>
+                </a:lnTo>
+                <a:lnTo>
+                  <a:pt x="4130936" y="3176513"/>
+                </a:lnTo>
+                <a:lnTo>
+                  <a:pt x="4081758" y="3176513"/>
+                </a:lnTo>
+                <a:lnTo>
+                  <a:pt x="4032580" y="3176513"/>
+                </a:lnTo>
+                <a:lnTo>
+                  <a:pt x="3983403" y="3176513"/>
+                </a:lnTo>
+                <a:lnTo>
+                  <a:pt x="3934225" y="3176513"/>
+                </a:lnTo>
+                <a:lnTo>
+                  <a:pt x="3885047" y="3176513"/>
+                </a:lnTo>
+                <a:lnTo>
+                  <a:pt x="3835869" y="3176513"/>
+                </a:lnTo>
+                <a:lnTo>
+                  <a:pt x="3786691" y="3176513"/>
+                </a:lnTo>
+                <a:lnTo>
+                  <a:pt x="3737513" y="3176513"/>
+                </a:lnTo>
+                <a:lnTo>
+                  <a:pt x="3688336" y="3176513"/>
+                </a:lnTo>
+                <a:lnTo>
+                  <a:pt x="3639158" y="3176513"/>
+                </a:lnTo>
+                <a:lnTo>
+                  <a:pt x="3589980" y="3176513"/>
+                </a:lnTo>
+                <a:lnTo>
+                  <a:pt x="3540802" y="3176513"/>
+                </a:lnTo>
+                <a:lnTo>
+                  <a:pt x="3491624" y="3176513"/>
+                </a:lnTo>
+                <a:lnTo>
+                  <a:pt x="3442447" y="3176513"/>
+                </a:lnTo>
+                <a:lnTo>
+                  <a:pt x="3393269" y="3176513"/>
+                </a:lnTo>
+                <a:lnTo>
+                  <a:pt x="3344091" y="3176513"/>
+                </a:lnTo>
+                <a:lnTo>
+                  <a:pt x="3294913" y="3176513"/>
+                </a:lnTo>
+                <a:lnTo>
+                  <a:pt x="3245735" y="3176513"/>
+                </a:lnTo>
+                <a:lnTo>
+                  <a:pt x="3196557" y="3176513"/>
+                </a:lnTo>
+                <a:lnTo>
+                  <a:pt x="3147380" y="3176513"/>
+                </a:lnTo>
+                <a:lnTo>
+                  <a:pt x="3098202" y="3176513"/>
+                </a:lnTo>
+                <a:lnTo>
+                  <a:pt x="3049024" y="3176513"/>
+                </a:lnTo>
+                <a:lnTo>
+                  <a:pt x="2999846" y="3176513"/>
+                </a:lnTo>
+                <a:lnTo>
+                  <a:pt x="2950668" y="3176513"/>
+                </a:lnTo>
+                <a:lnTo>
+                  <a:pt x="2901491" y="3176513"/>
+                </a:lnTo>
+                <a:lnTo>
+                  <a:pt x="2852313" y="3176513"/>
+                </a:lnTo>
+                <a:lnTo>
+                  <a:pt x="2803135" y="3176513"/>
+                </a:lnTo>
+                <a:lnTo>
+                  <a:pt x="2753957" y="3176513"/>
+                </a:lnTo>
+                <a:lnTo>
+                  <a:pt x="2704779" y="3176513"/>
+                </a:lnTo>
+                <a:lnTo>
+                  <a:pt x="2655602" y="3176513"/>
+                </a:lnTo>
+                <a:lnTo>
+                  <a:pt x="2606424" y="3176513"/>
+                </a:lnTo>
+                <a:lnTo>
+                  <a:pt x="2557246" y="3176513"/>
+                </a:lnTo>
+                <a:lnTo>
+                  <a:pt x="2508068" y="3176513"/>
+                </a:lnTo>
+                <a:lnTo>
+                  <a:pt x="2458890" y="3176513"/>
+                </a:lnTo>
+                <a:lnTo>
+                  <a:pt x="2409712" y="3176513"/>
+                </a:lnTo>
+                <a:lnTo>
+                  <a:pt x="2360535" y="3176513"/>
+                </a:lnTo>
+                <a:lnTo>
+                  <a:pt x="2311357" y="3176513"/>
+                </a:lnTo>
+                <a:lnTo>
+                  <a:pt x="2262179" y="3176513"/>
+                </a:lnTo>
+                <a:lnTo>
+                  <a:pt x="2213001" y="3176513"/>
+                </a:lnTo>
+                <a:lnTo>
+                  <a:pt x="2163823" y="3176513"/>
+                </a:lnTo>
+                <a:lnTo>
+                  <a:pt x="2114646" y="3176513"/>
+                </a:lnTo>
+                <a:lnTo>
+                  <a:pt x="2065468" y="3176513"/>
+                </a:lnTo>
+                <a:lnTo>
+                  <a:pt x="2016290" y="3176513"/>
+                </a:lnTo>
+                <a:lnTo>
+                  <a:pt x="1967112" y="3176513"/>
+                </a:lnTo>
+                <a:lnTo>
+                  <a:pt x="1917934" y="3176513"/>
+                </a:lnTo>
+                <a:lnTo>
+                  <a:pt x="1868756" y="3176513"/>
+                </a:lnTo>
+                <a:lnTo>
+                  <a:pt x="1819579" y="3176513"/>
+                </a:lnTo>
+                <a:lnTo>
+                  <a:pt x="1770401" y="3176513"/>
+                </a:lnTo>
+                <a:lnTo>
+                  <a:pt x="1721223" y="3176513"/>
+                </a:lnTo>
+                <a:lnTo>
+                  <a:pt x="1672045" y="3176513"/>
+                </a:lnTo>
+                <a:lnTo>
+                  <a:pt x="1622867" y="3176513"/>
+                </a:lnTo>
+                <a:lnTo>
+                  <a:pt x="1573690" y="3176513"/>
+                </a:lnTo>
+                <a:lnTo>
+                  <a:pt x="1524512" y="3176513"/>
+                </a:lnTo>
+                <a:lnTo>
+                  <a:pt x="1475334" y="3176513"/>
+                </a:lnTo>
+                <a:lnTo>
+                  <a:pt x="1426156" y="3176513"/>
+                </a:lnTo>
+                <a:lnTo>
+                  <a:pt x="1376978" y="3176513"/>
+                </a:lnTo>
+                <a:lnTo>
+                  <a:pt x="1327801" y="3176513"/>
+                </a:lnTo>
+                <a:lnTo>
+                  <a:pt x="1278623" y="3176513"/>
+                </a:lnTo>
+                <a:lnTo>
+                  <a:pt x="1229445" y="3176513"/>
+                </a:lnTo>
+                <a:lnTo>
+                  <a:pt x="1180267" y="3176513"/>
+                </a:lnTo>
+                <a:lnTo>
+                  <a:pt x="1131089" y="3176513"/>
+                </a:lnTo>
+                <a:lnTo>
+                  <a:pt x="1081911" y="3176513"/>
+                </a:lnTo>
+                <a:lnTo>
+                  <a:pt x="1032734" y="3176513"/>
+                </a:lnTo>
+                <a:lnTo>
+                  <a:pt x="983556" y="3176513"/>
+                </a:lnTo>
+                <a:lnTo>
+                  <a:pt x="934378" y="3176513"/>
+                </a:lnTo>
+                <a:lnTo>
+                  <a:pt x="885200" y="3176513"/>
+                </a:lnTo>
+                <a:lnTo>
+                  <a:pt x="836022" y="3176513"/>
+                </a:lnTo>
+                <a:lnTo>
+                  <a:pt x="786845" y="3176513"/>
+                </a:lnTo>
+                <a:lnTo>
+                  <a:pt x="737667" y="3176513"/>
+                </a:lnTo>
+                <a:lnTo>
+                  <a:pt x="688489" y="3176513"/>
+                </a:lnTo>
+                <a:lnTo>
+                  <a:pt x="639311" y="3176513"/>
+                </a:lnTo>
+                <a:lnTo>
+                  <a:pt x="590133" y="3176513"/>
+                </a:lnTo>
+                <a:lnTo>
+                  <a:pt x="540955" y="3176513"/>
+                </a:lnTo>
+                <a:lnTo>
+                  <a:pt x="491778" y="3176513"/>
+                </a:lnTo>
+                <a:lnTo>
+                  <a:pt x="442600" y="3176513"/>
+                </a:lnTo>
+                <a:lnTo>
+                  <a:pt x="393422" y="3176513"/>
+                </a:lnTo>
+                <a:lnTo>
+                  <a:pt x="344244" y="3176513"/>
+                </a:lnTo>
+                <a:lnTo>
+                  <a:pt x="295066" y="3176513"/>
+                </a:lnTo>
+                <a:lnTo>
+                  <a:pt x="245889" y="3176513"/>
+                </a:lnTo>
+                <a:lnTo>
+                  <a:pt x="196711" y="3176513"/>
+                </a:lnTo>
+                <a:lnTo>
+                  <a:pt x="147533" y="3176513"/>
+                </a:lnTo>
+                <a:lnTo>
+                  <a:pt x="98355" y="3176513"/>
+                </a:lnTo>
+                <a:lnTo>
+                  <a:pt x="49177" y="3176513"/>
+                </a:lnTo>
+                <a:lnTo>
+                  <a:pt x="0" y="3176513"/>
+                </a:lnTo>
+                <a:close/>
+              </a:path>
+            </a:pathLst>
+          </a:custGeom>
+          <a:solidFill>
+            <a:srgbClr val="8EDBD4">
+              <a:alpha val="22000"/>
+            </a:srgbClr>
+          </a:solidFill>
+          <a:ln w="10160">
+            <a:solidFill>
+              <a:srgbClr val="8EDBD4">
+                <a:alpha val="22000"/>
+              </a:srgbClr>
+            </a:solidFill>
+          </a:ln>
+          <a:effectLst/>
+        </p:spPr>
+        <p:txBody>
+          <a:bodyPr rtlCol="0" anchor="ctr"/>
+          <a:lstStyle/>
+          <a:p>
+            <a:pPr algn="ctr"/>
+          </a:p>
+        </p:txBody>
+      </p:sp>
+      <p:sp>
+        <p:nvSpPr>
+          <p:cNvPr id="42" name="A-E07 polygon 40" descr="sci-ppt:o040"/>
+          <p:cNvSpPr/>
+          <p:nvPr/>
+        </p:nvSpPr>
+        <p:spPr>
+          <a:xfrm>
+            <a:off x="914400" y="1924549"/>
+            <a:ext cx="5802982" cy="3104651"/>
+          </a:xfrm>
+          <a:custGeom>
+            <a:avLst/>
+            <a:gdLst/>
+            <a:ahLst/>
+            <a:cxnLst/>
+            <a:rect l="l" t="t" r="r" b="b"/>
+            <a:pathLst>
+              <a:path w="5802982" h="3104651">
+                <a:moveTo>
+                  <a:pt x="0" y="3104651"/>
+                </a:moveTo>
+                <a:lnTo>
+                  <a:pt x="49177" y="3104572"/>
+                </a:lnTo>
+                <a:lnTo>
+                  <a:pt x="98355" y="3104334"/>
+                </a:lnTo>
+                <a:lnTo>
+                  <a:pt x="147533" y="3103931"/>
+                </a:lnTo>
+                <a:lnTo>
+                  <a:pt x="196711" y="3103360"/>
+                </a:lnTo>
+                <a:lnTo>
+                  <a:pt x="245889" y="3102614"/>
+                </a:lnTo>
+                <a:lnTo>
+                  <a:pt x="295066" y="3101688"/>
+                </a:lnTo>
+                <a:lnTo>
+                  <a:pt x="344244" y="3100576"/>
+                </a:lnTo>
+                <a:lnTo>
+                  <a:pt x="393422" y="3099272"/>
+                </a:lnTo>
+                <a:lnTo>
+                  <a:pt x="442600" y="3097768"/>
+                </a:lnTo>
+                <a:lnTo>
+                  <a:pt x="491778" y="3096059"/>
+                </a:lnTo>
+                <a:lnTo>
+                  <a:pt x="540955" y="3094138"/>
+                </a:lnTo>
+                <a:lnTo>
+                  <a:pt x="590133" y="3091996"/>
+                </a:lnTo>
+                <a:lnTo>
+                  <a:pt x="639311" y="3089628"/>
+                </a:lnTo>
+                <a:lnTo>
+                  <a:pt x="688489" y="3087026"/>
+                </a:lnTo>
+                <a:lnTo>
+                  <a:pt x="737667" y="3084182"/>
+                </a:lnTo>
+                <a:lnTo>
+                  <a:pt x="786845" y="3081089"/>
+                </a:lnTo>
+                <a:lnTo>
+                  <a:pt x="836022" y="3077740"/>
+                </a:lnTo>
+                <a:lnTo>
+                  <a:pt x="885200" y="3074127"/>
+                </a:lnTo>
+                <a:lnTo>
+                  <a:pt x="934378" y="3070241"/>
+                </a:lnTo>
+                <a:lnTo>
+                  <a:pt x="983556" y="3066077"/>
+                </a:lnTo>
+                <a:lnTo>
+                  <a:pt x="1032734" y="3061625"/>
+                </a:lnTo>
+                <a:lnTo>
+                  <a:pt x="1081911" y="3056878"/>
+                </a:lnTo>
+                <a:lnTo>
+                  <a:pt x="1131089" y="3051828"/>
+                </a:lnTo>
+                <a:lnTo>
+                  <a:pt x="1180267" y="3046468"/>
+                </a:lnTo>
+                <a:lnTo>
+                  <a:pt x="1229445" y="3040789"/>
+                </a:lnTo>
+                <a:lnTo>
+                  <a:pt x="1278623" y="3034784"/>
+                </a:lnTo>
+                <a:lnTo>
+                  <a:pt x="1327801" y="3028444"/>
+                </a:lnTo>
+                <a:lnTo>
+                  <a:pt x="1376978" y="3021762"/>
+                </a:lnTo>
+                <a:lnTo>
+                  <a:pt x="1426156" y="3014730"/>
+                </a:lnTo>
+                <a:lnTo>
+                  <a:pt x="1475334" y="3007339"/>
+                </a:lnTo>
+                <a:lnTo>
+                  <a:pt x="1524512" y="2999582"/>
+                </a:lnTo>
+                <a:lnTo>
+                  <a:pt x="1573690" y="2991451"/>
+                </a:lnTo>
+                <a:lnTo>
+                  <a:pt x="1622867" y="2982938"/>
+                </a:lnTo>
+                <a:lnTo>
+                  <a:pt x="1672045" y="2974034"/>
+                </a:lnTo>
+                <a:lnTo>
+                  <a:pt x="1721223" y="2964731"/>
+                </a:lnTo>
+                <a:lnTo>
+                  <a:pt x="1770401" y="2955023"/>
+                </a:lnTo>
+                <a:lnTo>
+                  <a:pt x="1819579" y="2944899"/>
+                </a:lnTo>
+                <a:lnTo>
+                  <a:pt x="1868756" y="2934354"/>
+                </a:lnTo>
+                <a:lnTo>
+                  <a:pt x="1917934" y="2923377"/>
+                </a:lnTo>
+                <a:lnTo>
+                  <a:pt x="1967112" y="2911962"/>
+                </a:lnTo>
+                <a:lnTo>
+                  <a:pt x="2016290" y="2900099"/>
+                </a:lnTo>
+                <a:lnTo>
+                  <a:pt x="2065468" y="2887782"/>
+                </a:lnTo>
+                <a:lnTo>
+                  <a:pt x="2114646" y="2875002"/>
+                </a:lnTo>
+                <a:lnTo>
+                  <a:pt x="2163823" y="2861750"/>
+                </a:lnTo>
+                <a:lnTo>
+                  <a:pt x="2213001" y="2848019"/>
+                </a:lnTo>
+                <a:lnTo>
+                  <a:pt x="2262179" y="2833801"/>
+                </a:lnTo>
+                <a:lnTo>
+                  <a:pt x="2311357" y="2819087"/>
+                </a:lnTo>
+                <a:lnTo>
+                  <a:pt x="2360535" y="2803869"/>
+                </a:lnTo>
+                <a:lnTo>
+                  <a:pt x="2409712" y="2788140"/>
+                </a:lnTo>
+                <a:lnTo>
+                  <a:pt x="2458890" y="2771891"/>
+                </a:lnTo>
+                <a:lnTo>
+                  <a:pt x="2508068" y="2755113"/>
+                </a:lnTo>
+                <a:lnTo>
+                  <a:pt x="2557246" y="2737799"/>
+                </a:lnTo>
+                <a:lnTo>
+                  <a:pt x="2606424" y="2719941"/>
+                </a:lnTo>
+                <a:lnTo>
+                  <a:pt x="2655602" y="2701530"/>
+                </a:lnTo>
+                <a:lnTo>
+                  <a:pt x="2704779" y="2682559"/>
+                </a:lnTo>
+                <a:lnTo>
+                  <a:pt x="2753957" y="2663018"/>
+                </a:lnTo>
+                <a:lnTo>
+                  <a:pt x="2803135" y="2642901"/>
+                </a:lnTo>
+                <a:lnTo>
+                  <a:pt x="2852313" y="2622198"/>
+                </a:lnTo>
+                <a:lnTo>
+                  <a:pt x="2901491" y="2600902"/>
+                </a:lnTo>
+                <a:lnTo>
+                  <a:pt x="2950668" y="2579005"/>
+                </a:lnTo>
+                <a:lnTo>
+                  <a:pt x="2999846" y="2556498"/>
+                </a:lnTo>
+                <a:lnTo>
+                  <a:pt x="3049024" y="2533373"/>
+                </a:lnTo>
+                <a:lnTo>
+                  <a:pt x="3098202" y="2509622"/>
+                </a:lnTo>
+                <a:lnTo>
+                  <a:pt x="3147380" y="2485237"/>
+                </a:lnTo>
+                <a:lnTo>
+                  <a:pt x="3196557" y="2460209"/>
+                </a:lnTo>
+                <a:lnTo>
+                  <a:pt x="3245735" y="2434531"/>
+                </a:lnTo>
+                <a:lnTo>
+                  <a:pt x="3294913" y="2408195"/>
+                </a:lnTo>
+                <a:lnTo>
+                  <a:pt x="3344091" y="2381191"/>
+                </a:lnTo>
+                <a:lnTo>
+                  <a:pt x="3393269" y="2353513"/>
+                </a:lnTo>
+                <a:lnTo>
+                  <a:pt x="3442447" y="2325151"/>
+                </a:lnTo>
+                <a:lnTo>
+                  <a:pt x="3491624" y="2296098"/>
+                </a:lnTo>
+                <a:lnTo>
+                  <a:pt x="3540802" y="2266346"/>
+                </a:lnTo>
+                <a:lnTo>
+                  <a:pt x="3589980" y="2235885"/>
+                </a:lnTo>
+                <a:lnTo>
+                  <a:pt x="3639158" y="2204709"/>
+                </a:lnTo>
+                <a:lnTo>
+                  <a:pt x="3688336" y="2172809"/>
+                </a:lnTo>
+                <a:lnTo>
+                  <a:pt x="3737513" y="2140177"/>
+                </a:lnTo>
+                <a:lnTo>
+                  <a:pt x="3786691" y="2106804"/>
+                </a:lnTo>
+                <a:lnTo>
+                  <a:pt x="3835869" y="2072682"/>
+                </a:lnTo>
+                <a:lnTo>
+                  <a:pt x="3885047" y="2037804"/>
+                </a:lnTo>
+                <a:lnTo>
+                  <a:pt x="3934225" y="2002161"/>
+                </a:lnTo>
+                <a:lnTo>
+                  <a:pt x="3983403" y="1965744"/>
+                </a:lnTo>
+                <a:lnTo>
+                  <a:pt x="4032580" y="1928546"/>
+                </a:lnTo>
+                <a:lnTo>
+                  <a:pt x="4081758" y="1890559"/>
+                </a:lnTo>
+                <a:lnTo>
+                  <a:pt x="4130936" y="1851774"/>
+                </a:lnTo>
+                <a:lnTo>
+                  <a:pt x="4180114" y="1812183"/>
+                </a:lnTo>
+                <a:lnTo>
+                  <a:pt x="4229292" y="1771778"/>
+                </a:lnTo>
+                <a:lnTo>
+                  <a:pt x="4278469" y="1730551"/>
+                </a:lnTo>
+                <a:lnTo>
+                  <a:pt x="4327647" y="1688493"/>
+                </a:lnTo>
+                <a:lnTo>
+                  <a:pt x="4376825" y="1645597"/>
+                </a:lnTo>
+                <a:lnTo>
+                  <a:pt x="4426003" y="1601854"/>
+                </a:lnTo>
+                <a:lnTo>
+                  <a:pt x="4475181" y="1557256"/>
+                </a:lnTo>
+                <a:lnTo>
+                  <a:pt x="4524358" y="1511795"/>
+                </a:lnTo>
+                <a:lnTo>
+                  <a:pt x="4573536" y="1465462"/>
+                </a:lnTo>
+                <a:lnTo>
+                  <a:pt x="4622714" y="1418250"/>
+                </a:lnTo>
+                <a:lnTo>
+                  <a:pt x="4671892" y="1370150"/>
+                </a:lnTo>
+                <a:lnTo>
+                  <a:pt x="4721070" y="1321154"/>
+                </a:lnTo>
+                <a:lnTo>
+                  <a:pt x="4770248" y="1271254"/>
+                </a:lnTo>
+                <a:lnTo>
+                  <a:pt x="4819425" y="1220442"/>
+                </a:lnTo>
+                <a:lnTo>
+                  <a:pt x="4868603" y="1168709"/>
+                </a:lnTo>
+                <a:lnTo>
+                  <a:pt x="4917781" y="1116048"/>
+                </a:lnTo>
+                <a:lnTo>
+                  <a:pt x="4966959" y="1062449"/>
+                </a:lnTo>
+                <a:lnTo>
+                  <a:pt x="5016137" y="1007906"/>
+                </a:lnTo>
+                <a:lnTo>
+                  <a:pt x="5065314" y="952409"/>
+                </a:lnTo>
+                <a:lnTo>
+                  <a:pt x="5114492" y="895951"/>
+                </a:lnTo>
+                <a:lnTo>
+                  <a:pt x="5163670" y="838524"/>
+                </a:lnTo>
+                <a:lnTo>
+                  <a:pt x="5212848" y="780118"/>
+                </a:lnTo>
+                <a:lnTo>
+                  <a:pt x="5262026" y="720726"/>
+                </a:lnTo>
+                <a:lnTo>
+                  <a:pt x="5311204" y="660341"/>
+                </a:lnTo>
+                <a:lnTo>
+                  <a:pt x="5360381" y="598953"/>
+                </a:lnTo>
+                <a:lnTo>
+                  <a:pt x="5409559" y="536554"/>
+                </a:lnTo>
+                <a:lnTo>
+                  <a:pt x="5458737" y="473136"/>
+                </a:lnTo>
+                <a:lnTo>
+                  <a:pt x="5507915" y="408692"/>
+                </a:lnTo>
+                <a:lnTo>
+                  <a:pt x="5557093" y="343212"/>
+                </a:lnTo>
+                <a:lnTo>
+                  <a:pt x="5606270" y="276689"/>
+                </a:lnTo>
+                <a:lnTo>
+                  <a:pt x="5655448" y="209115"/>
+                </a:lnTo>
+                <a:lnTo>
+                  <a:pt x="5704626" y="140481"/>
+                </a:lnTo>
+                <a:lnTo>
+                  <a:pt x="5753804" y="70779"/>
+                </a:lnTo>
+                <a:lnTo>
+                  <a:pt x="5802982" y="0"/>
+                </a:lnTo>
+              </a:path>
+            </a:pathLst>
+          </a:custGeom>
+          <a:noFill/>
+          <a:ln w="43180">
+            <a:solidFill>
+              <a:srgbClr val="8EDBD4"/>
+            </a:solidFill>
+          </a:ln>
+          <a:effectLst/>
+        </p:spPr>
+        <p:txBody>
+          <a:bodyPr rtlCol="0" anchor="ctr"/>
+          <a:lstStyle/>
+          <a:p>
+            <a:pPr algn="ctr"/>
+          </a:p>
+        </p:txBody>
+      </p:sp>
+      <p:sp>
+        <p:nvSpPr>
+          <p:cNvPr id="43" name="A-E07 ellipse 41" descr="sci-ppt:o041"/>
+          <p:cNvSpPr/>
+          <p:nvPr/>
+        </p:nvSpPr>
+        <p:spPr>
+          <a:xfrm>
+            <a:off x="6693408" y="1779535"/>
+            <a:ext cx="146304" cy="146304"/>
           </a:xfrm>
           <a:prstGeom prst="ellipse">
+            <a:avLst/>
+          </a:prstGeom>
+          <a:solidFill>
+            <a:srgbClr val="F2B880"/>
+          </a:solidFill>
+          <a:ln w="12700">
+            <a:solidFill>
+              <a:srgbClr val="F2B880"/>
+            </a:solidFill>
+          </a:ln>
+          <a:effectLst/>
+        </p:spPr>
+        <p:txBody>
+          <a:bodyPr rtlCol="0" anchor="ctr"/>
+          <a:lstStyle/>
+          <a:p>
+            <a:pPr algn="ctr"/>
+          </a:p>
+        </p:txBody>
+      </p:sp>
+      <p:sp>
+        <p:nvSpPr>
+          <p:cNvPr id="44" name="A-E07 text 42" descr="sci-ppt:o042"/>
+          <p:cNvSpPr txBox="1"/>
+          <p:nvPr/>
+        </p:nvSpPr>
+        <p:spPr>
+          <a:xfrm>
+            <a:off x="4114800" y="1395487"/>
+            <a:ext cx="2560320" cy="231648"/>
+          </a:xfrm>
+          <a:prstGeom prst="rect">
+            <a:avLst/>
+          </a:prstGeom>
+          <a:noFill/>
+          <a:effectLst/>
+        </p:spPr>
+        <p:txBody>
+          <a:bodyPr wrap="none" lIns="18288" rIns="18288" tIns="18288" bIns="18288" anchor="t">
+            <a:spAutoFit/>
+          </a:bodyPr>
+          <a:lstStyle/>
+          <a:p>
+            <a:pPr algn="l">
+              <a:spcAft>
+                <a:spcPts val="0"/>
+              </a:spcAft>
+            </a:pPr>
+            <a:r>
+              <a:rPr sz="1200" b="0" i="0">
+                <a:solidFill>
+                  <a:srgbClr val="F2B880"/>
+                </a:solidFill>
+                <a:latin typeface="Arial"/>
+              </a:rPr>
+              <a:t>W_g(30 µm) = 4.5160 nJ</a:t>
+            </a:r>
+          </a:p>
+        </p:txBody>
+      </p:sp>
+      <p:sp>
+        <p:nvSpPr>
+          <p:cNvPr id="45" name="A-E07 round_rect 43" descr="sci-ppt:o043"/>
+          <p:cNvSpPr/>
+          <p:nvPr/>
+        </p:nvSpPr>
+        <p:spPr>
+          <a:xfrm>
+            <a:off x="7040880" y="1371600"/>
+            <a:ext cx="4800600" cy="3657600"/>
+          </a:xfrm>
+          <a:prstGeom prst="roundRect">
             <a:avLst/>
           </a:prstGeom>
           <a:solidFill>
             <a:srgbClr val="213E4B"/>
           </a:solidFill>
-          <a:ln w="17780">
+          <a:ln w="20320">
             <a:solidFill>
-              <a:srgbClr val="B4C7D2"/>
+              <a:srgbClr val="8EDBD4"/>
             </a:solidFill>
           </a:ln>
           <a:effectLst/>
@@ -3198,40 +5470,16 @@
           </a:p>
         </p:txBody>
       </p:sp>
-      <p:cxnSp>
-        <p:nvCxnSpPr>
-          <p:cNvPr id="5" name="arrow 3" descr="sci-ppt:obj-003"/>
-          <p:cNvCxnSpPr/>
-          <p:nvPr/>
-        </p:nvCxnSpPr>
-        <p:spPr>
-          <a:xfrm>
-            <a:off x="1645920" y="1636776"/>
-            <a:ext cx="704088" cy="0"/>
-          </a:xfrm>
-          <a:prstGeom prst="line">
-            <a:avLst/>
-          </a:prstGeom>
-          <a:ln w="21590">
-            <a:solidFill>
-              <a:srgbClr val="8EDBD4"/>
-            </a:solidFill>
-            <a:headEnd type="none" w="med" len="med"/>
-            <a:tailEnd type="triangle" w="med" len="med"/>
-          </a:ln>
-          <a:effectLst/>
-        </p:spPr>
-      </p:cxnSp>
-      <p:sp>
-        <p:nvSpPr>
-          <p:cNvPr id="6" name="text 4" descr="sci-ppt:obj-004"/>
+      <p:sp>
+        <p:nvSpPr>
+          <p:cNvPr id="46" name="A-E07 text 44" descr="sci-ppt:o044"/>
           <p:cNvSpPr txBox="1"/>
           <p:nvPr/>
         </p:nvSpPr>
         <p:spPr>
           <a:xfrm>
-            <a:off x="2011680" y="1252728"/>
-            <a:ext cx="822960" cy="310896"/>
+            <a:off x="7150608" y="1426464"/>
+            <a:ext cx="4581144" cy="254889"/>
           </a:xfrm>
           <a:prstGeom prst="rect">
             <a:avLst/>
@@ -3240,7 +5488,7 @@
           <a:effectLst/>
         </p:spPr>
         <p:txBody>
-          <a:bodyPr wrap="none" lIns="0" rIns="0" tIns="0" bIns="0" anchor="ctr">
+          <a:bodyPr wrap="none" lIns="18288" rIns="18288" tIns="18288" bIns="18288" anchor="t">
             <a:spAutoFit/>
           </a:bodyPr>
           <a:lstStyle/>
@@ -3251,27 +5499,67 @@
               </a:spcAft>
             </a:pPr>
             <a:r>
-              <a:rPr sz="1296" b="0" i="0">
+              <a:rPr sz="1350" b="1" i="0">
+                <a:solidFill>
+                  <a:srgbClr val="8EDBD4"/>
+                </a:solidFill>
+                <a:latin typeface="Arial"/>
+              </a:rPr>
+              <a:t>Integrate pressure over volume</a:t>
+            </a:r>
+          </a:p>
+        </p:txBody>
+      </p:sp>
+      <p:sp>
+        <p:nvSpPr>
+          <p:cNvPr id="47" name="A-E07 text 45" descr="sci-ppt:o045"/>
+          <p:cNvSpPr txBox="1"/>
+          <p:nvPr/>
+        </p:nvSpPr>
+        <p:spPr>
+          <a:xfrm>
+            <a:off x="7178040" y="1828800"/>
+            <a:ext cx="4572000" cy="247142"/>
+          </a:xfrm>
+          <a:prstGeom prst="rect">
+            <a:avLst/>
+          </a:prstGeom>
+          <a:noFill/>
+          <a:effectLst/>
+        </p:spPr>
+        <p:txBody>
+          <a:bodyPr wrap="none" lIns="18288" rIns="18288" tIns="18288" bIns="18288" anchor="t">
+            <a:spAutoFit/>
+          </a:bodyPr>
+          <a:lstStyle/>
+          <a:p>
+            <a:pPr algn="l">
+              <a:spcAft>
+                <a:spcPts val="0"/>
+              </a:spcAft>
+            </a:pPr>
+            <a:r>
+              <a:rPr sz="1300" b="1" i="0">
                 <a:solidFill>
                   <a:srgbClr val="E7F0F3"/>
                 </a:solidFill>
                 <a:latin typeface="Arial"/>
               </a:rPr>
-              <a:t>R</a:t>
-            </a:r>
-          </a:p>
-        </p:txBody>
-      </p:sp>
-      <p:sp>
-        <p:nvSpPr>
-          <p:cNvPr id="7" name="text 5" descr="sci-ppt:obj-005"/>
+              <a:t>W_g = 4π ∫ pₑₗ(ξ) ξ² dξ</a:t>
+            </a:r>
+          </a:p>
+        </p:txBody>
+      </p:sp>
+      <p:sp>
+        <p:nvSpPr>
+          <p:cNvPr id="48" name="A-E07 text 46" descr="sci-ppt:o046"/>
           <p:cNvSpPr txBox="1"/>
           <p:nvPr/>
         </p:nvSpPr>
         <p:spPr>
           <a:xfrm>
-            <a:off x="1005840" y="2459736"/>
-            <a:ext cx="2194560" cy="310896"/>
+            <a:off x="7178040" y="2331720"/>
+            <a:ext cx="4572000" cy="223900"/>
           </a:xfrm>
           <a:prstGeom prst="rect">
             <a:avLst/>
@@ -3280,7 +5568,7 @@
           <a:effectLst/>
         </p:spPr>
         <p:txBody>
-          <a:bodyPr wrap="none" lIns="0" rIns="0" tIns="0" bIns="0" anchor="ctr">
+          <a:bodyPr wrap="none" lIns="18288" rIns="18288" tIns="18288" bIns="18288" anchor="t">
             <a:spAutoFit/>
           </a:bodyPr>
           <a:lstStyle/>
@@ -3291,27 +5579,163 @@
               </a:spcAft>
             </a:pPr>
             <a:r>
-              <a:rPr sz="1296" b="0" i="0">
+              <a:rPr sz="1150" b="1" i="0">
+                <a:solidFill>
+                  <a:srgbClr val="F2B880"/>
+                </a:solidFill>
+                <a:latin typeface="Arial"/>
+              </a:rPr>
+              <a:t>= 2πG_g [5ξ³/3 − 2R_ref ξ² + R_ref⁴/ξ]</a:t>
+            </a:r>
+          </a:p>
+        </p:txBody>
+      </p:sp>
+      <p:sp>
+        <p:nvSpPr>
+          <p:cNvPr id="49" name="A-E07 text 47" descr="sci-ppt:o047"/>
+          <p:cNvSpPr txBox="1"/>
+          <p:nvPr/>
+        </p:nvSpPr>
+        <p:spPr>
+          <a:xfrm>
+            <a:off x="7178040" y="2834640"/>
+            <a:ext cx="4572000" cy="216153"/>
+          </a:xfrm>
+          <a:prstGeom prst="rect">
+            <a:avLst/>
+          </a:prstGeom>
+          <a:noFill/>
+          <a:effectLst/>
+        </p:spPr>
+        <p:txBody>
+          <a:bodyPr wrap="none" lIns="18288" rIns="18288" tIns="18288" bIns="18288" anchor="t">
+            <a:spAutoFit/>
+          </a:bodyPr>
+          <a:lstStyle/>
+          <a:p>
+            <a:pPr algn="l">
+              <a:spcAft>
+                <a:spcPts val="0"/>
+              </a:spcAft>
+            </a:pPr>
+            <a:r>
+              <a:rPr sz="1100" b="1" i="0">
+                <a:solidFill>
+                  <a:srgbClr val="F2B880"/>
+                </a:solidFill>
+                <a:latin typeface="Arial"/>
+              </a:rPr>
+              <a:t>W_g = 2πG_g[5R³/3 − 2R_ref R² + R_ref⁴/R − 2R_ref³/3]</a:t>
+            </a:r>
+          </a:p>
+        </p:txBody>
+      </p:sp>
+      <p:sp>
+        <p:nvSpPr>
+          <p:cNvPr id="50" name="A-E07 text 48" descr="sci-ppt:o048"/>
+          <p:cNvSpPr txBox="1"/>
+          <p:nvPr/>
+        </p:nvSpPr>
+        <p:spPr>
+          <a:xfrm>
+            <a:off x="7178040" y="3474720"/>
+            <a:ext cx="4572000" cy="417576"/>
+          </a:xfrm>
+          <a:prstGeom prst="rect">
+            <a:avLst/>
+          </a:prstGeom>
+          <a:noFill/>
+          <a:effectLst/>
+        </p:spPr>
+        <p:txBody>
+          <a:bodyPr wrap="none" lIns="18288" rIns="18288" tIns="18288" bIns="18288" anchor="t">
+            <a:spAutoFit/>
+          </a:bodyPr>
+          <a:lstStyle/>
+          <a:p>
+            <a:pPr algn="l">
+              <a:spcAft>
+                <a:spcPts val="0"/>
+              </a:spcAft>
+            </a:pPr>
+            <a:r>
+              <a:rPr sz="1200" b="0" i="0">
+                <a:solidFill>
+                  <a:srgbClr val="B4C7D2"/>
+                </a:solidFill>
+                <a:latin typeface="Arial"/>
+              </a:rPr>
+              <a:t>Numerical quadrature: 4.516040 nJ;  closed form:</a:t>
+            </a:r>
+          </a:p>
+          <a:p>
+            <a:pPr algn="l">
+              <a:spcAft>
+                <a:spcPts val="0"/>
+              </a:spcAft>
+            </a:pPr>
+            <a:r>
+              <a:rPr sz="1200" b="0" i="0">
+                <a:solidFill>
+                  <a:srgbClr val="B4C7D2"/>
+                </a:solidFill>
+                <a:latin typeface="Arial"/>
+              </a:rPr>
+              <a:t>4.516039 nJ.</a:t>
+            </a:r>
+          </a:p>
+        </p:txBody>
+      </p:sp>
+      <p:sp>
+        <p:nvSpPr>
+          <p:cNvPr id="51" name="A-E07 text 49" descr="sci-ppt:o049"/>
+          <p:cNvSpPr txBox="1"/>
+          <p:nvPr/>
+        </p:nvSpPr>
+        <p:spPr>
+          <a:xfrm>
+            <a:off x="914400" y="5733288"/>
+            <a:ext cx="10972800" cy="239395"/>
+          </a:xfrm>
+          <a:prstGeom prst="rect">
+            <a:avLst/>
+          </a:prstGeom>
+          <a:noFill/>
+          <a:effectLst/>
+        </p:spPr>
+        <p:txBody>
+          <a:bodyPr wrap="none" lIns="18288" rIns="18288" tIns="18288" bIns="18288" anchor="t">
+            <a:spAutoFit/>
+          </a:bodyPr>
+          <a:lstStyle/>
+          <a:p>
+            <a:pPr algn="l">
+              <a:spcAft>
+                <a:spcPts val="0"/>
+              </a:spcAft>
+            </a:pPr>
+            <a:r>
+              <a:rPr sz="1250" b="0" i="0">
                 <a:solidFill>
                   <a:srgbClr val="E7F0F3"/>
                 </a:solidFill>
                 <a:latin typeface="Arial"/>
               </a:rPr>
-              <a:t>Rref → R</a:t>
-            </a:r>
-          </a:p>
-        </p:txBody>
-      </p:sp>
-      <p:sp>
-        <p:nvSpPr>
-          <p:cNvPr id="8" name="text 6" descr="sci-ppt:obj-006"/>
+              <a:t>4πξ² dξ is the cavity volume increment, so the integral is work done against the network.</a:t>
+            </a:r>
+          </a:p>
+        </p:txBody>
+      </p:sp>
+      <p:sp>
+        <p:nvSpPr>
+          <p:cNvPr id="52" name="A-E07 text 50" descr="sci-ppt:o050"/>
           <p:cNvSpPr txBox="1"/>
           <p:nvPr/>
         </p:nvSpPr>
         <p:spPr>
           <a:xfrm>
-            <a:off x="749808" y="649224"/>
-            <a:ext cx="3566160" cy="310896"/>
+            <a:off x="320040" y="6510528"/>
+            <a:ext cx="11521440" cy="200660"/>
           </a:xfrm>
           <a:prstGeom prst="rect">
             <a:avLst/>
@@ -3320,7 +5744,7 @@
           <a:effectLst/>
         </p:spPr>
         <p:txBody>
-          <a:bodyPr wrap="none" lIns="0" rIns="0" tIns="0" bIns="0" anchor="ctr">
+          <a:bodyPr wrap="none" lIns="18288" rIns="18288" tIns="18288" bIns="18288" anchor="t">
             <a:spAutoFit/>
           </a:bodyPr>
           <a:lstStyle/>
@@ -3331,549 +5755,13 @@
               </a:spcAft>
             </a:pPr>
             <a:r>
-              <a:rPr sz="1296" b="0" i="0">
+              <a:rPr sz="1000" b="0" i="0">
                 <a:solidFill>
-                  <a:srgbClr val="E7F0F3"/>
+                  <a:srgbClr val="B4C7D2"/>
                 </a:solidFill>
                 <a:latin typeface="Arial"/>
               </a:rPr>
-              <a:t>Cavity pressure work: pb dV</a:t>
-            </a:r>
-          </a:p>
-        </p:txBody>
-      </p:sp>
-      <p:sp>
-        <p:nvSpPr>
-          <p:cNvPr id="9" name="rect 7" descr="sci-ppt:obj-007"/>
-          <p:cNvSpPr/>
-          <p:nvPr/>
-        </p:nvSpPr>
-        <p:spPr>
-          <a:xfrm>
-            <a:off x="3986784" y="1143000"/>
-            <a:ext cx="3749039" cy="1124712"/>
-          </a:xfrm>
-          <a:prstGeom prst="rect">
-            <a:avLst/>
-          </a:prstGeom>
-          <a:solidFill>
-            <a:srgbClr val="213E4B"/>
-          </a:solidFill>
-          <a:ln w="17780">
-            <a:solidFill>
-              <a:srgbClr val="B4C7D2"/>
-            </a:solidFill>
-          </a:ln>
-          <a:effectLst/>
-        </p:spPr>
-        <p:txBody>
-          <a:bodyPr rtlCol="0" anchor="ctr"/>
-          <a:lstStyle/>
-          <a:p>
-            <a:pPr algn="ctr"/>
-          </a:p>
-        </p:txBody>
-      </p:sp>
-      <p:sp>
-        <p:nvSpPr>
-          <p:cNvPr id="10" name="text 8" descr="sci-ppt:obj-008"/>
-          <p:cNvSpPr txBox="1"/>
-          <p:nvPr/>
-        </p:nvSpPr>
-        <p:spPr>
-          <a:xfrm>
-            <a:off x="4197096" y="1307592"/>
-            <a:ext cx="3474720" cy="310896"/>
-          </a:xfrm>
-          <a:prstGeom prst="rect">
-            <a:avLst/>
-          </a:prstGeom>
-          <a:noFill/>
-          <a:effectLst/>
-        </p:spPr>
-        <p:txBody>
-          <a:bodyPr wrap="none" lIns="0" rIns="0" tIns="0" bIns="0" anchor="ctr">
-            <a:spAutoFit/>
-          </a:bodyPr>
-          <a:lstStyle/>
-          <a:p>
-            <a:pPr algn="l">
-              <a:spcAft>
-                <a:spcPts val="0"/>
-              </a:spcAft>
-            </a:pPr>
-            <a:r>
-              <a:rPr sz="1296" b="0" i="0">
-                <a:solidFill>
-                  <a:srgbClr val="E7F0F3"/>
-                </a:solidFill>
-                <a:latin typeface="Arial"/>
-              </a:rPr>
-              <a:t>Elastic storage: Wg</a:t>
-            </a:r>
-          </a:p>
-        </p:txBody>
-      </p:sp>
-      <p:sp>
-        <p:nvSpPr>
-          <p:cNvPr id="11" name="text 9" descr="sci-ppt:obj-009"/>
-          <p:cNvSpPr txBox="1"/>
-          <p:nvPr/>
-        </p:nvSpPr>
-        <p:spPr>
-          <a:xfrm>
-            <a:off x="4197096" y="1700784"/>
-            <a:ext cx="3474720" cy="310896"/>
-          </a:xfrm>
-          <a:prstGeom prst="rect">
-            <a:avLst/>
-          </a:prstGeom>
-          <a:noFill/>
-          <a:effectLst/>
-        </p:spPr>
-        <p:txBody>
-          <a:bodyPr wrap="none" lIns="0" rIns="0" tIns="0" bIns="0" anchor="ctr">
-            <a:spAutoFit/>
-          </a:bodyPr>
-          <a:lstStyle/>
-          <a:p>
-            <a:pPr algn="l">
-              <a:spcAft>
-                <a:spcPts val="0"/>
-              </a:spcAft>
-            </a:pPr>
-            <a:r>
-              <a:rPr sz="1296" b="0" i="0">
-                <a:solidFill>
-                  <a:srgbClr val="E7F0F3"/>
-                </a:solidFill>
-                <a:latin typeface="Arial"/>
-              </a:rPr>
-              <a:t>Viscous loss: Ḋg ≥ 0</a:t>
-            </a:r>
-          </a:p>
-        </p:txBody>
-      </p:sp>
-      <p:cxnSp>
-        <p:nvCxnSpPr>
-          <p:cNvPr id="12" name="arrow 10" descr="sci-ppt:obj-010"/>
-          <p:cNvCxnSpPr/>
-          <p:nvPr/>
-        </p:nvCxnSpPr>
-        <p:spPr>
-          <a:xfrm>
-            <a:off x="2496312" y="1645920"/>
-            <a:ext cx="1444751" cy="0"/>
-          </a:xfrm>
-          <a:prstGeom prst="line">
-            <a:avLst/>
-          </a:prstGeom>
-          <a:ln w="21590">
-            <a:solidFill>
-              <a:srgbClr val="8EDBD4"/>
-            </a:solidFill>
-            <a:headEnd type="none" w="med" len="med"/>
-            <a:tailEnd type="triangle" w="med" len="med"/>
-          </a:ln>
-          <a:effectLst/>
-        </p:spPr>
-      </p:cxnSp>
-      <p:sp>
-        <p:nvSpPr>
-          <p:cNvPr id="13" name="text 11" descr="sci-ppt:obj-011"/>
-          <p:cNvSpPr txBox="1"/>
-          <p:nvPr/>
-        </p:nvSpPr>
-        <p:spPr>
-          <a:xfrm>
-            <a:off x="3986784" y="2432304"/>
-            <a:ext cx="4114800" cy="310896"/>
-          </a:xfrm>
-          <a:prstGeom prst="rect">
-            <a:avLst/>
-          </a:prstGeom>
-          <a:noFill/>
-          <a:effectLst/>
-        </p:spPr>
-        <p:txBody>
-          <a:bodyPr wrap="none" lIns="0" rIns="0" tIns="0" bIns="0" anchor="ctr">
-            <a:spAutoFit/>
-          </a:bodyPr>
-          <a:lstStyle/>
-          <a:p>
-            <a:pPr algn="l">
-              <a:spcAft>
-                <a:spcPts val="0"/>
-              </a:spcAft>
-            </a:pPr>
-            <a:r>
-              <a:rPr sz="1296" b="0" i="0">
-                <a:solidFill>
-                  <a:srgbClr val="E7F0F3"/>
-                </a:solidFill>
-                <a:latin typeface="Arial"/>
-              </a:rPr>
-              <a:t>Gg , ηg ; intact network</a:t>
-            </a:r>
-          </a:p>
-        </p:txBody>
-      </p:sp>
-      <p:sp>
-        <p:nvSpPr>
-          <p:cNvPr id="14" name="text 12" descr="sci-ppt:obj-012"/>
-          <p:cNvSpPr txBox="1"/>
-          <p:nvPr/>
-        </p:nvSpPr>
-        <p:spPr>
-          <a:xfrm>
-            <a:off x="749808" y="2871216"/>
-            <a:ext cx="7772400" cy="310896"/>
-          </a:xfrm>
-          <a:prstGeom prst="rect">
-            <a:avLst/>
-          </a:prstGeom>
-          <a:noFill/>
-          <a:effectLst/>
-        </p:spPr>
-        <p:txBody>
-          <a:bodyPr wrap="none" lIns="0" rIns="0" tIns="0" bIns="0" anchor="ctr">
-            <a:spAutoFit/>
-          </a:bodyPr>
-          <a:lstStyle/>
-          <a:p>
-            <a:pPr algn="l">
-              <a:spcAft>
-                <a:spcPts val="0"/>
-              </a:spcAft>
-            </a:pPr>
-            <a:r>
-              <a:rPr sz="1224" b="0" i="0">
-                <a:solidFill>
-                  <a:srgbClr val="E7F0F3"/>
-                </a:solidFill>
-                <a:latin typeface="Arial"/>
-              </a:rPr>
-              <a:t>Jet energy requires a separate load path and budget</a:t>
-            </a:r>
-          </a:p>
-        </p:txBody>
-      </p:sp>
-      <p:sp>
-        <p:nvSpPr>
-          <p:cNvPr id="15" name="text 13" descr="sci-ppt:obj-013"/>
-          <p:cNvSpPr txBox="1"/>
-          <p:nvPr/>
-        </p:nvSpPr>
-        <p:spPr>
-          <a:xfrm>
-            <a:off x="256032" y="3465576"/>
-            <a:ext cx="7315200" cy="310896"/>
-          </a:xfrm>
-          <a:prstGeom prst="rect">
-            <a:avLst/>
-          </a:prstGeom>
-          <a:noFill/>
-          <a:effectLst/>
-        </p:spPr>
-        <p:txBody>
-          <a:bodyPr wrap="none" lIns="0" rIns="0" tIns="0" bIns="0" anchor="ctr">
-            <a:spAutoFit/>
-          </a:bodyPr>
-          <a:lstStyle/>
-          <a:p>
-            <a:pPr algn="l">
-              <a:spcAft>
-                <a:spcPts val="0"/>
-              </a:spcAft>
-            </a:pPr>
-            <a:r>
-              <a:rPr sz="1296" b="0" i="0">
-                <a:solidFill>
-                  <a:srgbClr val="8EDBD4"/>
-                </a:solidFill>
-                <a:latin typeface="Arial"/>
-              </a:rPr>
-              <a:t>Variables and physical limits</a:t>
-            </a:r>
-          </a:p>
-        </p:txBody>
-      </p:sp>
-      <p:sp>
-        <p:nvSpPr>
-          <p:cNvPr id="16" name="text 14" descr="sci-ppt:obj-014"/>
-          <p:cNvSpPr txBox="1"/>
-          <p:nvPr/>
-        </p:nvSpPr>
-        <p:spPr>
-          <a:xfrm>
-            <a:off x="365760" y="3813048"/>
-            <a:ext cx="8412480" cy="310896"/>
-          </a:xfrm>
-          <a:prstGeom prst="rect">
-            <a:avLst/>
-          </a:prstGeom>
-          <a:noFill/>
-          <a:effectLst/>
-        </p:spPr>
-        <p:txBody>
-          <a:bodyPr wrap="none" lIns="0" rIns="0" tIns="0" bIns="0" anchor="ctr">
-            <a:spAutoFit/>
-          </a:bodyPr>
-          <a:lstStyle/>
-          <a:p>
-            <a:pPr algn="l">
-              <a:spcAft>
-                <a:spcPts val="0"/>
-              </a:spcAft>
-            </a:pPr>
-            <a:r>
-              <a:rPr sz="1152" b="0" i="0">
-                <a:solidFill>
-                  <a:srgbClr val="E7F0F3"/>
-                </a:solidFill>
-                <a:latin typeface="Arial"/>
-              </a:rPr>
-              <a:t>• Rref → R</a:t>
-            </a:r>
-          </a:p>
-        </p:txBody>
-      </p:sp>
-      <p:sp>
-        <p:nvSpPr>
-          <p:cNvPr id="17" name="text 15" descr="sci-ppt:obj-015"/>
-          <p:cNvSpPr txBox="1"/>
-          <p:nvPr/>
-        </p:nvSpPr>
-        <p:spPr>
-          <a:xfrm>
-            <a:off x="365760" y="4023360"/>
-            <a:ext cx="8412480" cy="310896"/>
-          </a:xfrm>
-          <a:prstGeom prst="rect">
-            <a:avLst/>
-          </a:prstGeom>
-          <a:noFill/>
-          <a:effectLst/>
-        </p:spPr>
-        <p:txBody>
-          <a:bodyPr wrap="none" lIns="0" rIns="0" tIns="0" bIns="0" anchor="ctr">
-            <a:spAutoFit/>
-          </a:bodyPr>
-          <a:lstStyle/>
-          <a:p>
-            <a:pPr algn="l">
-              <a:spcAft>
-                <a:spcPts val="0"/>
-              </a:spcAft>
-            </a:pPr>
-            <a:r>
-              <a:rPr sz="1152" b="0" i="0">
-                <a:solidFill>
-                  <a:srgbClr val="E7F0F3"/>
-                </a:solidFill>
-                <a:latin typeface="Arial"/>
-              </a:rPr>
-              <a:t>• pel(ξ): cavity work pressure</a:t>
-            </a:r>
-          </a:p>
-        </p:txBody>
-      </p:sp>
-      <p:sp>
-        <p:nvSpPr>
-          <p:cNvPr id="18" name="text 16" descr="sci-ppt:obj-016"/>
-          <p:cNvSpPr txBox="1"/>
-          <p:nvPr/>
-        </p:nvSpPr>
-        <p:spPr>
-          <a:xfrm>
-            <a:off x="365760" y="4233672"/>
-            <a:ext cx="8412480" cy="310896"/>
-          </a:xfrm>
-          <a:prstGeom prst="rect">
-            <a:avLst/>
-          </a:prstGeom>
-          <a:noFill/>
-          <a:effectLst/>
-        </p:spPr>
-        <p:txBody>
-          <a:bodyPr wrap="none" lIns="0" rIns="0" tIns="0" bIns="0" anchor="ctr">
-            <a:spAutoFit/>
-          </a:bodyPr>
-          <a:lstStyle/>
-          <a:p>
-            <a:pPr algn="l">
-              <a:spcAft>
-                <a:spcPts val="0"/>
-              </a:spcAft>
-            </a:pPr>
-            <a:r>
-              <a:rPr sz="1152" b="0" i="0">
-                <a:solidFill>
-                  <a:srgbClr val="E7F0F3"/>
-                </a:solidFill>
-                <a:latin typeface="Arial"/>
-              </a:rPr>
-              <a:t>• 4πξ²dξ: volume increment</a:t>
-            </a:r>
-          </a:p>
-        </p:txBody>
-      </p:sp>
-      <p:sp>
-        <p:nvSpPr>
-          <p:cNvPr id="19" name="text 17" descr="sci-ppt:obj-017"/>
-          <p:cNvSpPr txBox="1"/>
-          <p:nvPr/>
-        </p:nvSpPr>
-        <p:spPr>
-          <a:xfrm>
-            <a:off x="365760" y="4443984"/>
-            <a:ext cx="8412480" cy="310896"/>
-          </a:xfrm>
-          <a:prstGeom prst="rect">
-            <a:avLst/>
-          </a:prstGeom>
-          <a:noFill/>
-          <a:effectLst/>
-        </p:spPr>
-        <p:txBody>
-          <a:bodyPr wrap="none" lIns="0" rIns="0" tIns="0" bIns="0" anchor="ctr">
-            <a:spAutoFit/>
-          </a:bodyPr>
-          <a:lstStyle/>
-          <a:p>
-            <a:pPr algn="l">
-              <a:spcAft>
-                <a:spcPts val="0"/>
-              </a:spcAft>
-            </a:pPr>
-            <a:r>
-              <a:rPr sz="1152" b="0" i="0">
-                <a:solidFill>
-                  <a:srgbClr val="E7F0F3"/>
-                </a:solidFill>
-                <a:latin typeface="Arial"/>
-              </a:rPr>
-              <a:t>• Wg: network energy</a:t>
-            </a:r>
-          </a:p>
-        </p:txBody>
-      </p:sp>
-      <p:sp>
-        <p:nvSpPr>
-          <p:cNvPr id="20" name="text 18" descr="sci-ppt:obj-018"/>
-          <p:cNvSpPr txBox="1"/>
-          <p:nvPr/>
-        </p:nvSpPr>
-        <p:spPr>
-          <a:xfrm>
-            <a:off x="365760" y="4654296"/>
-            <a:ext cx="8412480" cy="310896"/>
-          </a:xfrm>
-          <a:prstGeom prst="rect">
-            <a:avLst/>
-          </a:prstGeom>
-          <a:noFill/>
-          <a:effectLst/>
-        </p:spPr>
-        <p:txBody>
-          <a:bodyPr wrap="none" lIns="0" rIns="0" tIns="0" bIns="0" anchor="ctr">
-            <a:spAutoFit/>
-          </a:bodyPr>
-          <a:lstStyle/>
-          <a:p>
-            <a:pPr algn="l">
-              <a:spcAft>
-                <a:spcPts val="0"/>
-              </a:spcAft>
-            </a:pPr>
-            <a:r>
-              <a:rPr sz="1152" b="0" i="0">
-                <a:solidFill>
-                  <a:srgbClr val="E7F0F3"/>
-                </a:solidFill>
-                <a:latin typeface="Arial"/>
-              </a:rPr>
-              <a:t>• Gg, π</a:t>
-            </a:r>
-          </a:p>
-        </p:txBody>
-      </p:sp>
-      <p:sp>
-        <p:nvSpPr>
-          <p:cNvPr id="21" name="text 19" descr="sci-ppt:obj-019"/>
-          <p:cNvSpPr txBox="1"/>
-          <p:nvPr/>
-        </p:nvSpPr>
-        <p:spPr>
-          <a:xfrm>
-            <a:off x="365760" y="4864608"/>
-            <a:ext cx="8412480" cy="310896"/>
-          </a:xfrm>
-          <a:prstGeom prst="rect">
-            <a:avLst/>
-          </a:prstGeom>
-          <a:noFill/>
-          <a:effectLst/>
-        </p:spPr>
-        <p:txBody>
-          <a:bodyPr wrap="none" lIns="0" rIns="0" tIns="0" bIns="0" anchor="ctr">
-            <a:spAutoFit/>
-          </a:bodyPr>
-          <a:lstStyle/>
-          <a:p>
-            <a:pPr algn="l">
-              <a:spcAft>
-                <a:spcPts val="0"/>
-              </a:spcAft>
-            </a:pPr>
-            <a:r>
-              <a:rPr sz="1152" b="0" i="0">
-                <a:solidFill>
-                  <a:srgbClr val="E7F0F3"/>
-                </a:solidFill>
-                <a:latin typeface="Arial"/>
-              </a:rPr>
-              <a:t>Use pressure times displaced volume</a:t>
-            </a:r>
-          </a:p>
-        </p:txBody>
-      </p:sp>
-      <p:sp>
-        <p:nvSpPr>
-          <p:cNvPr id="22" name="text 20" descr="sci-ppt:obj-020"/>
-          <p:cNvSpPr txBox="1"/>
-          <p:nvPr/>
-        </p:nvSpPr>
-        <p:spPr>
-          <a:xfrm>
-            <a:off x="365760" y="5074920"/>
-            <a:ext cx="8412480" cy="310896"/>
-          </a:xfrm>
-          <a:prstGeom prst="rect">
-            <a:avLst/>
-          </a:prstGeom>
-          <a:noFill/>
-          <a:effectLst/>
-        </p:spPr>
-        <p:txBody>
-          <a:bodyPr wrap="none" lIns="0" rIns="0" tIns="0" bIns="0" anchor="ctr">
-            <a:spAutoFit/>
-          </a:bodyPr>
-          <a:lstStyle/>
-          <a:p>
-            <a:pPr algn="l">
-              <a:spcAft>
-                <a:spcPts val="0"/>
-              </a:spcAft>
-            </a:pPr>
-            <a:r>
-              <a:rPr sz="1152" b="0" i="0">
-                <a:solidFill>
-                  <a:srgbClr val="E7F0F3"/>
-                </a:solidFill>
-                <a:latin typeface="Arial"/>
-              </a:rPr>
-              <a:t>Elastic work can return during recoil</a:t>
+              <a:t>Elastic work of Eq. A-E07 (R_ref = 5 µm, G_g = 20 kPa).</a:t>
             </a:r>
           </a:p>
         </p:txBody>
